--- a/4 Routine SA processing.pptx
+++ b/4 Routine SA processing.pptx
@@ -5,10 +5,10 @@
     <p:sldMasterId id="2147483648" r:id="rId4"/>
   </p:sldMasterIdLst>
   <p:notesMasterIdLst>
-    <p:notesMasterId r:id="rId17"/>
+    <p:notesMasterId r:id="rId18"/>
   </p:notesMasterIdLst>
   <p:handoutMasterIdLst>
-    <p:handoutMasterId r:id="rId18"/>
+    <p:handoutMasterId r:id="rId19"/>
   </p:handoutMasterIdLst>
   <p:sldIdLst>
     <p:sldId id="256" r:id="rId5"/>
@@ -22,12 +22,13 @@
     <p:sldId id="280" r:id="rId13"/>
     <p:sldId id="281" r:id="rId14"/>
     <p:sldId id="265" r:id="rId15"/>
-    <p:sldId id="261" r:id="rId16"/>
+    <p:sldId id="282" r:id="rId16"/>
+    <p:sldId id="261" r:id="rId17"/>
   </p:sldIdLst>
   <p:sldSz cx="12192000" cy="6858000"/>
   <p:notesSz cx="6858000" cy="9144000"/>
   <p:custDataLst>
-    <p:tags r:id="rId19"/>
+    <p:tags r:id="rId20"/>
   </p:custDataLst>
   <p:defaultTextStyle>
     <a:defPPr marR="0" lvl="0" algn="l" rtl="0">
@@ -277,7 +278,7 @@
       <p15:notesGuideLst xmlns:p15="http://schemas.microsoft.com/office/powerpoint/2012/main"/>
     </p:ext>
     <p:ext uri="http://customooxmlschemas.google.com/">
-      <go:slidesCustomData xmlns:mc="http://schemas.openxmlformats.org/markup-compatibility/2006" xmlns:mv="urn:schemas-microsoft-com:mac:vml" xmlns:c="http://schemas.openxmlformats.org/drawingml/2006/chart" xmlns:dgm="http://schemas.openxmlformats.org/drawingml/2006/diagram" xmlns:o="urn:schemas-microsoft-com:office:office" xmlns:v="urn:schemas-microsoft-com:vml" xmlns:pvml="urn:schemas-microsoft-com:office:powerpoint" xmlns:com="http://schemas.openxmlformats.org/drawingml/2006/compatibility" xmlns:p14="http://schemas.microsoft.com/office/powerpoint/2010/main" xmlns:p15="http://schemas.microsoft.com/office/powerpoint/2012/main" xmlns:ahyp="http://schemas.microsoft.com/office/drawing/2018/hyperlinkcolor" xmlns:go="http://customooxmlschemas.google.com/" xmlns="" r:id="rId59" roundtripDataSignature="AMtx7mh3YP3xexYcFoahXa2ehi0H5V4Zaw=="/>
+      <go:slidesCustomData xmlns="" xmlns:go="http://customooxmlschemas.google.com/" xmlns:ahyp="http://schemas.microsoft.com/office/drawing/2018/hyperlinkcolor" xmlns:p15="http://schemas.microsoft.com/office/powerpoint/2012/main" xmlns:p14="http://schemas.microsoft.com/office/powerpoint/2010/main" xmlns:com="http://schemas.openxmlformats.org/drawingml/2006/compatibility" xmlns:pvml="urn:schemas-microsoft-com:office:powerpoint" xmlns:v="urn:schemas-microsoft-com:vml" xmlns:o="urn:schemas-microsoft-com:office:office" xmlns:dgm="http://schemas.openxmlformats.org/drawingml/2006/diagram" xmlns:c="http://schemas.openxmlformats.org/drawingml/2006/chart" xmlns:mv="urn:schemas-microsoft-com:mac:vml" xmlns:mc="http://schemas.openxmlformats.org/markup-compatibility/2006" r:id="rId59" roundtripDataSignature="AMtx7mh3YP3xexYcFoahXa2ehi0H5V4Zaw=="/>
     </p:ext>
   </p:extLst>
 </p:presentation>
@@ -385,7 +386,7 @@
           <a:p>
             <a:fld id="{0CBFB8CE-488C-4A7E-87F2-3AF6127C51C1}" type="datetimeFigureOut">
               <a:rPr lang="en-IE" smtClean="0"/>
-              <a:t>28/08/2026</a:t>
+              <a:t>28/09/2026</a:t>
             </a:fld>
             <a:endParaRPr lang="en-IE"/>
           </a:p>
@@ -2490,8 +2491,8 @@
         </p:nvSpPr>
         <p:spPr>
           <a:xfrm>
-            <a:off x="970722" y="1901951"/>
-            <a:ext cx="10515597" cy="4194176"/>
+            <a:off x="970722" y="1349829"/>
+            <a:ext cx="10515597" cy="4746298"/>
           </a:xfrm>
         </p:spPr>
         <p:txBody>
@@ -5446,7 +5447,7 @@
     <p:sldLayoutId id="2147483723" r:id="rId5"/>
     <p:sldLayoutId id="2147483728" r:id="rId6"/>
   </p:sldLayoutIdLst>
-  <p:hf sldNum="0" hdr="0" dt="0"/>
+  <p:hf hdr="0" dt="0"/>
   <p:txStyles>
     <p:titleStyle>
       <a:defPPr marR="0" lvl="0" algn="l" rtl="0">
@@ -6303,12 +6304,18 @@
       </p:sp>
       <p:sp>
         <p:nvSpPr>
-          <p:cNvPr id="3" name="Content Placeholder 2"/>
+          <p:cNvPr id="4" name="Espace réservé du numéro de diapositive 3">
+            <a:extLst>
+              <a:ext uri="{FF2B5EF4-FFF2-40B4-BE49-F238E27FC236}">
+                <a16:creationId xmlns:a16="http://schemas.microsoft.com/office/drawing/2014/main" id="{17EB304D-76EE-7C5B-D3D0-E1E3CA8C80C1}"/>
+              </a:ext>
+            </a:extLst>
+          </p:cNvPr>
           <p:cNvSpPr>
             <a:spLocks noGrp="1"/>
           </p:cNvSpPr>
           <p:nvPr>
-            <p:ph idx="1"/>
+            <p:ph type="sldNum" idx="12"/>
           </p:nvPr>
         </p:nvSpPr>
         <p:spPr/>
@@ -6316,115 +6323,158 @@
           <a:bodyPr/>
           <a:lstStyle/>
           <a:p>
+            <a:fld id="{653AEAC0-5B23-41FC-B9A5-2681735F7C65}" type="slidenum">
+              <a:rPr lang="en-US" smtClean="0"/>
+              <a:t>10</a:t>
+            </a:fld>
+            <a:endParaRPr lang="en-US"/>
+          </a:p>
+        </p:txBody>
+      </p:sp>
+      <p:sp>
+        <p:nvSpPr>
+          <p:cNvPr id="3" name="Content Placeholder 2"/>
+          <p:cNvSpPr>
+            <a:spLocks noGrp="1"/>
+          </p:cNvSpPr>
+          <p:nvPr>
+            <p:ph sz="half" idx="2"/>
+          </p:nvPr>
+        </p:nvSpPr>
+        <p:spPr/>
+        <p:txBody>
+          <a:bodyPr/>
+          <a:lstStyle/>
+          <a:p>
             <a:pPr lvl="2"/>
             <a:r>
-              <a:rPr lang="fr-BE" dirty="0" err="1"/>
+              <a:rPr lang="fr-BE" sz="2000" dirty="0" err="1"/>
               <a:t>Define</a:t>
             </a:r>
             <a:r>
-              <a:rPr lang="fr-BE" dirty="0"/>
+              <a:rPr lang="fr-BE" sz="2000" dirty="0"/>
               <a:t> the setting file for the </a:t>
             </a:r>
             <a:r>
-              <a:rPr lang="fr-BE" dirty="0" err="1"/>
+              <a:rPr lang="fr-BE" sz="2000" dirty="0" err="1"/>
               <a:t>cruncher</a:t>
             </a:r>
-            <a:endParaRPr lang="fr-BE" dirty="0"/>
+            <a:endParaRPr lang="fr-BE" sz="2000" dirty="0"/>
           </a:p>
           <a:p>
             <a:pPr lvl="3"/>
             <a:r>
-              <a:rPr lang="fr-BE" dirty="0"/>
+              <a:rPr lang="fr-BE" sz="1800" dirty="0"/>
               <a:t>Output, format, </a:t>
             </a:r>
             <a:r>
-              <a:rPr lang="fr-BE" dirty="0" err="1"/>
+              <a:rPr lang="fr-BE" sz="1800" dirty="0" err="1"/>
               <a:t>paths</a:t>
             </a:r>
             <a:r>
-              <a:rPr lang="fr-BE" dirty="0"/>
+              <a:rPr lang="fr-BE" sz="1800" dirty="0"/>
               <a:t>…</a:t>
             </a:r>
           </a:p>
           <a:p>
             <a:pPr lvl="2"/>
-            <a:endParaRPr lang="fr-BE" dirty="0"/>
+            <a:endParaRPr lang="fr-BE" sz="2000" dirty="0"/>
           </a:p>
           <a:p>
             <a:pPr lvl="2"/>
-            <a:endParaRPr lang="fr-BE" dirty="0"/>
+            <a:endParaRPr lang="fr-BE" sz="2000" dirty="0"/>
           </a:p>
           <a:p>
             <a:pPr lvl="2"/>
-            <a:endParaRPr lang="fr-BE" dirty="0"/>
+            <a:endParaRPr lang="fr-BE" sz="2000" dirty="0"/>
           </a:p>
           <a:p>
             <a:pPr lvl="2"/>
-            <a:endParaRPr lang="fr-BE" dirty="0"/>
+            <a:endParaRPr lang="fr-BE" sz="2000" dirty="0"/>
           </a:p>
           <a:p>
             <a:pPr lvl="2"/>
             <a:r>
-              <a:rPr lang="fr-BE" dirty="0"/>
+              <a:rPr lang="fr-BE" sz="2000" dirty="0"/>
               <a:t>Call the command line </a:t>
             </a:r>
           </a:p>
           <a:p>
             <a:pPr lvl="1"/>
             <a:r>
-              <a:rPr lang="fr-BE" dirty="0" err="1"/>
+              <a:rPr lang="fr-BE" sz="2400" dirty="0" err="1"/>
               <a:t>Next</a:t>
             </a:r>
             <a:r>
-              <a:rPr lang="fr-BE" dirty="0"/>
+              <a:rPr lang="fr-BE" sz="2400" dirty="0"/>
               <a:t> estimations</a:t>
             </a:r>
           </a:p>
           <a:p>
             <a:pPr lvl="2"/>
             <a:r>
-              <a:rPr lang="fr-BE" dirty="0" err="1"/>
+              <a:rPr lang="fr-BE" sz="2000" dirty="0" err="1"/>
               <a:t>Modify</a:t>
             </a:r>
             <a:r>
-              <a:rPr lang="fr-BE" dirty="0"/>
+              <a:rPr lang="fr-BE" sz="2000" dirty="0"/>
               <a:t> the setting file (if </a:t>
             </a:r>
             <a:r>
-              <a:rPr lang="fr-BE" dirty="0" err="1"/>
+              <a:rPr lang="fr-BE" sz="2000" dirty="0" err="1"/>
               <a:t>need</a:t>
             </a:r>
             <a:r>
-              <a:rPr lang="fr-BE" dirty="0"/>
+              <a:rPr lang="fr-BE" sz="2000" dirty="0"/>
               <a:t> </a:t>
             </a:r>
             <a:r>
-              <a:rPr lang="fr-BE" dirty="0" err="1"/>
+              <a:rPr lang="fr-BE" sz="2000" dirty="0" err="1"/>
               <a:t>be</a:t>
             </a:r>
             <a:r>
-              <a:rPr lang="fr-BE" dirty="0"/>
+              <a:rPr lang="fr-BE" sz="2000" dirty="0"/>
               <a:t>)</a:t>
             </a:r>
           </a:p>
           <a:p>
             <a:pPr lvl="2"/>
             <a:r>
-              <a:rPr lang="fr-BE" dirty="0" err="1"/>
-              <a:t>Re</a:t>
-            </a:r>
-            <a:r>
-              <a:rPr lang="fr-BE" dirty="0"/>
-              <a:t>-call </a:t>
-            </a:r>
-            <a:r>
-              <a:rPr lang="fr-BE"/>
-              <a:t>the command line</a:t>
-            </a:r>
+              <a:rPr lang="fr-BE" sz="2000" dirty="0"/>
+              <a:t>Re-call the command line</a:t>
+            </a:r>
+            <a:endParaRPr lang="en-US" sz="2000" dirty="0"/>
+          </a:p>
+          <a:p>
             <a:endParaRPr lang="en-US" dirty="0"/>
           </a:p>
-          <a:p>
-            <a:endParaRPr lang="en-US" dirty="0"/>
+        </p:txBody>
+      </p:sp>
+      <p:sp>
+        <p:nvSpPr>
+          <p:cNvPr id="5" name="Espace réservé du pied de page 4"/>
+          <p:cNvSpPr>
+            <a:spLocks noGrp="1"/>
+          </p:cNvSpPr>
+          <p:nvPr>
+            <p:ph type="ftr" sz="quarter" idx="4294967295"/>
+          </p:nvPr>
+        </p:nvSpPr>
+        <p:spPr>
+          <a:xfrm>
+            <a:off x="0" y="0"/>
+            <a:ext cx="0" cy="0"/>
+          </a:xfrm>
+        </p:spPr>
+        <p:txBody>
+          <a:bodyPr/>
+          <a:lstStyle/>
+          <a:p>
+            <a:r>
+              <a:rPr lang="en-GB"/>
+              <a:t>Routine SA processing</a:t>
+            </a:r>
+            <a:endParaRPr lang="en-US"/>
           </a:p>
         </p:txBody>
       </p:sp>
@@ -6451,7 +6501,7 @@
         </p:blipFill>
         <p:spPr bwMode="auto">
           <a:xfrm>
-            <a:off x="3791744" y="2564905"/>
+            <a:off x="4619059" y="2260105"/>
             <a:ext cx="6184596" cy="1239193"/>
           </a:xfrm>
           <a:prstGeom prst="rect">
@@ -6477,29 +6527,6 @@
           </a:extLst>
         </p:spPr>
       </p:pic>
-      <p:sp>
-        <p:nvSpPr>
-          <p:cNvPr id="5" name="Espace réservé du pied de page 4"/>
-          <p:cNvSpPr>
-            <a:spLocks noGrp="1"/>
-          </p:cNvSpPr>
-          <p:nvPr>
-            <p:ph type="ftr" sz="quarter" idx="11"/>
-          </p:nvPr>
-        </p:nvSpPr>
-        <p:spPr/>
-        <p:txBody>
-          <a:bodyPr/>
-          <a:lstStyle/>
-          <a:p>
-            <a:r>
-              <a:rPr lang="en-GB"/>
-              <a:t>Routine SA processing</a:t>
-            </a:r>
-            <a:endParaRPr lang="en-US"/>
-          </a:p>
-        </p:txBody>
-      </p:sp>
     </p:spTree>
     <p:extLst>
       <p:ext uri="{BB962C8B-B14F-4D97-AF65-F5344CB8AC3E}">
@@ -6553,9 +6580,38 @@
           <a:p>
             <a:r>
               <a:rPr lang="fr-BE" dirty="0"/>
-              <a:t>RJDemetra3</a:t>
+              <a:t>rjd3</a:t>
             </a:r>
             <a:endParaRPr lang="en-GB" dirty="0"/>
+          </a:p>
+        </p:txBody>
+      </p:sp>
+      <p:sp>
+        <p:nvSpPr>
+          <p:cNvPr id="3" name="Espace réservé du numéro de diapositive 2">
+            <a:extLst>
+              <a:ext uri="{FF2B5EF4-FFF2-40B4-BE49-F238E27FC236}">
+                <a16:creationId xmlns:a16="http://schemas.microsoft.com/office/drawing/2014/main" id="{E1C8EF21-D3A7-57D3-6FF4-9CEA37063669}"/>
+              </a:ext>
+            </a:extLst>
+          </p:cNvPr>
+          <p:cNvSpPr>
+            <a:spLocks noGrp="1"/>
+          </p:cNvSpPr>
+          <p:nvPr>
+            <p:ph type="sldNum" idx="12"/>
+          </p:nvPr>
+        </p:nvSpPr>
+        <p:spPr/>
+        <p:txBody>
+          <a:bodyPr/>
+          <a:lstStyle/>
+          <a:p>
+            <a:fld id="{653AEAC0-5B23-41FC-B9A5-2681735F7C65}" type="slidenum">
+              <a:rPr lang="en-US" smtClean="0"/>
+              <a:t>11</a:t>
+            </a:fld>
+            <a:endParaRPr lang="en-US"/>
           </a:p>
         </p:txBody>
       </p:sp>
@@ -6572,7 +6628,7 @@
             <a:picLocks noGrp="1" noChangeAspect="1"/>
           </p:cNvPicPr>
           <p:nvPr>
-            <p:ph idx="1"/>
+            <p:ph sz="half" idx="2"/>
           </p:nvPr>
         </p:nvPicPr>
         <p:blipFill>
@@ -6583,8 +6639,8 @@
         </p:blipFill>
         <p:spPr>
           <a:xfrm>
-            <a:off x="1981200" y="2248026"/>
-            <a:ext cx="8229600" cy="3230310"/>
+            <a:off x="1131888" y="1722437"/>
+            <a:ext cx="10191750" cy="4000500"/>
           </a:xfrm>
           <a:prstGeom prst="rect">
             <a:avLst/>
@@ -6634,10 +6690,15 @@
             <a:spLocks noGrp="1"/>
           </p:cNvSpPr>
           <p:nvPr>
-            <p:ph type="ftr" sz="quarter" idx="11"/>
+            <p:ph type="ftr" sz="quarter" idx="4294967295"/>
           </p:nvPr>
         </p:nvSpPr>
-        <p:spPr/>
+        <p:spPr>
+          <a:xfrm>
+            <a:off x="0" y="0"/>
+            <a:ext cx="0" cy="0"/>
+          </a:xfrm>
+        </p:spPr>
         <p:txBody>
           <a:bodyPr/>
           <a:lstStyle/>
@@ -6664,6 +6725,119 @@
 </file>
 
 <file path=ppt/slides/slide12.xml><?xml version="1.0" encoding="utf-8"?>
+<p:sld xmlns:a="http://schemas.openxmlformats.org/drawingml/2006/main" xmlns:r="http://schemas.openxmlformats.org/officeDocument/2006/relationships" xmlns:p="http://schemas.openxmlformats.org/presentationml/2006/main">
+  <p:cSld>
+    <p:spTree>
+      <p:nvGrpSpPr>
+        <p:cNvPr id="1" name=""/>
+        <p:cNvGrpSpPr/>
+        <p:nvPr/>
+      </p:nvGrpSpPr>
+      <p:grpSpPr>
+        <a:xfrm>
+          <a:off x="0" y="0"/>
+          <a:ext cx="0" cy="0"/>
+          <a:chOff x="0" y="0"/>
+          <a:chExt cx="0" cy="0"/>
+        </a:xfrm>
+      </p:grpSpPr>
+      <p:sp>
+        <p:nvSpPr>
+          <p:cNvPr id="2" name="Titre 1">
+            <a:extLst>
+              <a:ext uri="{FF2B5EF4-FFF2-40B4-BE49-F238E27FC236}">
+                <a16:creationId xmlns:a16="http://schemas.microsoft.com/office/drawing/2014/main" id="{A4DAC0EE-6400-AF12-EBB9-C0029ACDA5B4}"/>
+              </a:ext>
+            </a:extLst>
+          </p:cNvPr>
+          <p:cNvSpPr>
+            <a:spLocks noGrp="1"/>
+          </p:cNvSpPr>
+          <p:nvPr>
+            <p:ph type="title"/>
+          </p:nvPr>
+        </p:nvSpPr>
+        <p:spPr/>
+        <p:txBody>
+          <a:bodyPr/>
+          <a:lstStyle/>
+          <a:p>
+            <a:r>
+              <a:rPr lang="en-GB" dirty="0"/>
+              <a:t>rjd3workspace</a:t>
+            </a:r>
+          </a:p>
+        </p:txBody>
+      </p:sp>
+      <p:sp>
+        <p:nvSpPr>
+          <p:cNvPr id="3" name="Espace réservé du numéro de diapositive 2">
+            <a:extLst>
+              <a:ext uri="{FF2B5EF4-FFF2-40B4-BE49-F238E27FC236}">
+                <a16:creationId xmlns:a16="http://schemas.microsoft.com/office/drawing/2014/main" id="{BFE1BD1E-EB5F-B89C-DE3F-EAE410644F2B}"/>
+              </a:ext>
+            </a:extLst>
+          </p:cNvPr>
+          <p:cNvSpPr>
+            <a:spLocks noGrp="1"/>
+          </p:cNvSpPr>
+          <p:nvPr>
+            <p:ph type="sldNum" idx="12"/>
+          </p:nvPr>
+        </p:nvSpPr>
+        <p:spPr/>
+        <p:txBody>
+          <a:bodyPr/>
+          <a:lstStyle/>
+          <a:p>
+            <a:fld id="{00000000-1234-1234-1234-123412341234}" type="slidenum">
+              <a:rPr lang="en-GB" smtClean="0"/>
+              <a:pPr/>
+              <a:t>12</a:t>
+            </a:fld>
+            <a:endParaRPr lang="en-GB"/>
+          </a:p>
+        </p:txBody>
+      </p:sp>
+      <p:sp>
+        <p:nvSpPr>
+          <p:cNvPr id="4" name="Espace réservé du contenu 3">
+            <a:extLst>
+              <a:ext uri="{FF2B5EF4-FFF2-40B4-BE49-F238E27FC236}">
+                <a16:creationId xmlns:a16="http://schemas.microsoft.com/office/drawing/2014/main" id="{279E8841-E2EE-F5F7-6448-F2543D7E3066}"/>
+              </a:ext>
+            </a:extLst>
+          </p:cNvPr>
+          <p:cNvSpPr>
+            <a:spLocks noGrp="1"/>
+          </p:cNvSpPr>
+          <p:nvPr>
+            <p:ph sz="half" idx="2"/>
+          </p:nvPr>
+        </p:nvSpPr>
+        <p:spPr/>
+        <p:txBody>
+          <a:bodyPr/>
+          <a:lstStyle/>
+          <a:p>
+            <a:endParaRPr lang="en-GB"/>
+          </a:p>
+        </p:txBody>
+      </p:sp>
+    </p:spTree>
+    <p:extLst>
+      <p:ext uri="{BB962C8B-B14F-4D97-AF65-F5344CB8AC3E}">
+        <p14:creationId xmlns:p14="http://schemas.microsoft.com/office/powerpoint/2010/main" val="1268215938"/>
+      </p:ext>
+    </p:extLst>
+  </p:cSld>
+  <p:clrMapOvr>
+    <a:masterClrMapping/>
+  </p:clrMapOvr>
+</p:sld>
+</file>
+
+<file path=ppt/slides/slide13.xml><?xml version="1.0" encoding="utf-8"?>
 <p:sld xmlns:a="http://schemas.openxmlformats.org/drawingml/2006/main" xmlns:r="http://schemas.openxmlformats.org/officeDocument/2006/relationships" xmlns:p="http://schemas.openxmlformats.org/presentationml/2006/main">
   <p:cSld>
     <p:spTree>
@@ -6727,6 +6901,36 @@
           <a:lstStyle/>
           <a:p>
             <a:endParaRPr lang="en-IE"/>
+          </a:p>
+        </p:txBody>
+      </p:sp>
+      <p:sp>
+        <p:nvSpPr>
+          <p:cNvPr id="4" name="Espace réservé du numéro de diapositive 3">
+            <a:extLst>
+              <a:ext uri="{FF2B5EF4-FFF2-40B4-BE49-F238E27FC236}">
+                <a16:creationId xmlns:a16="http://schemas.microsoft.com/office/drawing/2014/main" id="{B6CE85D8-800F-3492-DECD-2D0E496FA3F1}"/>
+              </a:ext>
+            </a:extLst>
+          </p:cNvPr>
+          <p:cNvSpPr>
+            <a:spLocks noGrp="1"/>
+          </p:cNvSpPr>
+          <p:nvPr>
+            <p:ph type="sldNum" idx="12"/>
+          </p:nvPr>
+        </p:nvSpPr>
+        <p:spPr/>
+        <p:txBody>
+          <a:bodyPr/>
+          <a:lstStyle/>
+          <a:p>
+            <a:fld id="{00000000-1234-1234-1234-123412341234}" type="slidenum">
+              <a:rPr lang="en-GB" smtClean="0"/>
+              <a:pPr/>
+              <a:t>13</a:t>
+            </a:fld>
+            <a:endParaRPr lang="en-GB"/>
           </a:p>
         </p:txBody>
       </p:sp>
@@ -6784,6 +6988,63 @@
               <a:t>developments</a:t>
             </a:r>
             <a:endParaRPr lang="en-US" dirty="0"/>
+          </a:p>
+        </p:txBody>
+      </p:sp>
+      <p:sp>
+        <p:nvSpPr>
+          <p:cNvPr id="3" name="Espace réservé du numéro de diapositive 2">
+            <a:extLst>
+              <a:ext uri="{FF2B5EF4-FFF2-40B4-BE49-F238E27FC236}">
+                <a16:creationId xmlns:a16="http://schemas.microsoft.com/office/drawing/2014/main" id="{750F3D5E-3534-743D-CB67-703F45B2B07C}"/>
+              </a:ext>
+            </a:extLst>
+          </p:cNvPr>
+          <p:cNvSpPr>
+            <a:spLocks noGrp="1"/>
+          </p:cNvSpPr>
+          <p:nvPr>
+            <p:ph type="sldNum" idx="12"/>
+          </p:nvPr>
+        </p:nvSpPr>
+        <p:spPr/>
+        <p:txBody>
+          <a:bodyPr/>
+          <a:lstStyle/>
+          <a:p>
+            <a:fld id="{653AEAC0-5B23-41FC-B9A5-2681735F7C65}" type="slidenum">
+              <a:rPr lang="en-US" smtClean="0"/>
+              <a:t>2</a:t>
+            </a:fld>
+            <a:endParaRPr lang="en-US"/>
+          </a:p>
+        </p:txBody>
+      </p:sp>
+      <p:sp>
+        <p:nvSpPr>
+          <p:cNvPr id="6" name="Espace réservé du pied de page 5"/>
+          <p:cNvSpPr>
+            <a:spLocks noGrp="1"/>
+          </p:cNvSpPr>
+          <p:nvPr>
+            <p:ph type="ftr" sz="quarter" idx="4294967295"/>
+          </p:nvPr>
+        </p:nvSpPr>
+        <p:spPr>
+          <a:xfrm>
+            <a:off x="0" y="0"/>
+            <a:ext cx="0" cy="0"/>
+          </a:xfrm>
+        </p:spPr>
+        <p:txBody>
+          <a:bodyPr/>
+          <a:lstStyle/>
+          <a:p>
+            <a:r>
+              <a:rPr lang="en-GB"/>
+              <a:t>Routine SA processing</a:t>
+            </a:r>
+            <a:endParaRPr lang="en-US"/>
           </a:p>
         </p:txBody>
       </p:sp>
@@ -7520,29 +7781,6 @@
           </a:fontRef>
         </p:style>
       </p:cxnSp>
-      <p:sp>
-        <p:nvSpPr>
-          <p:cNvPr id="6" name="Espace réservé du pied de page 5"/>
-          <p:cNvSpPr>
-            <a:spLocks noGrp="1"/>
-          </p:cNvSpPr>
-          <p:nvPr>
-            <p:ph type="ftr" sz="quarter" idx="11"/>
-          </p:nvPr>
-        </p:nvSpPr>
-        <p:spPr/>
-        <p:txBody>
-          <a:bodyPr/>
-          <a:lstStyle/>
-          <a:p>
-            <a:r>
-              <a:rPr lang="en-GB"/>
-              <a:t>Routine SA processing</a:t>
-            </a:r>
-            <a:endParaRPr lang="en-US"/>
-          </a:p>
-        </p:txBody>
-      </p:sp>
     </p:spTree>
     <p:extLst>
       <p:ext uri="{BB962C8B-B14F-4D97-AF65-F5344CB8AC3E}">
@@ -7604,6 +7842,35 @@
       </p:sp>
       <p:sp>
         <p:nvSpPr>
+          <p:cNvPr id="3" name="Espace réservé du numéro de diapositive 2">
+            <a:extLst>
+              <a:ext uri="{FF2B5EF4-FFF2-40B4-BE49-F238E27FC236}">
+                <a16:creationId xmlns:a16="http://schemas.microsoft.com/office/drawing/2014/main" id="{02CB535A-E16D-645D-78D3-C00FC9230D6D}"/>
+              </a:ext>
+            </a:extLst>
+          </p:cNvPr>
+          <p:cNvSpPr>
+            <a:spLocks noGrp="1"/>
+          </p:cNvSpPr>
+          <p:nvPr>
+            <p:ph type="sldNum" idx="12"/>
+          </p:nvPr>
+        </p:nvSpPr>
+        <p:spPr/>
+        <p:txBody>
+          <a:bodyPr/>
+          <a:lstStyle/>
+          <a:p>
+            <a:fld id="{653AEAC0-5B23-41FC-B9A5-2681735F7C65}" type="slidenum">
+              <a:rPr lang="en-US" smtClean="0"/>
+              <a:t>3</a:t>
+            </a:fld>
+            <a:endParaRPr lang="en-US"/>
+          </a:p>
+        </p:txBody>
+      </p:sp>
+      <p:sp>
+        <p:nvSpPr>
           <p:cNvPr id="5" name="Espace réservé du pied de page 4">
             <a:extLst>
               <a:ext uri="{FF2B5EF4-FFF2-40B4-BE49-F238E27FC236}">
@@ -7615,10 +7882,15 @@
             <a:spLocks noGrp="1"/>
           </p:cNvSpPr>
           <p:nvPr>
-            <p:ph type="ftr" sz="quarter" idx="11"/>
+            <p:ph type="ftr" sz="quarter" idx="4294967295"/>
           </p:nvPr>
         </p:nvSpPr>
-        <p:spPr/>
+        <p:spPr>
+          <a:xfrm>
+            <a:off x="0" y="0"/>
+            <a:ext cx="0" cy="0"/>
+          </a:xfrm>
+        </p:spPr>
         <p:txBody>
           <a:bodyPr/>
           <a:lstStyle/>
@@ -7745,6 +8017,63 @@
       </p:sp>
       <p:sp>
         <p:nvSpPr>
+          <p:cNvPr id="3" name="Espace réservé du numéro de diapositive 2">
+            <a:extLst>
+              <a:ext uri="{FF2B5EF4-FFF2-40B4-BE49-F238E27FC236}">
+                <a16:creationId xmlns:a16="http://schemas.microsoft.com/office/drawing/2014/main" id="{B42CBD2E-1470-5F6F-A6C5-93352D0A98ED}"/>
+              </a:ext>
+            </a:extLst>
+          </p:cNvPr>
+          <p:cNvSpPr>
+            <a:spLocks noGrp="1"/>
+          </p:cNvSpPr>
+          <p:nvPr>
+            <p:ph type="sldNum" idx="12"/>
+          </p:nvPr>
+        </p:nvSpPr>
+        <p:spPr/>
+        <p:txBody>
+          <a:bodyPr/>
+          <a:lstStyle/>
+          <a:p>
+            <a:fld id="{653AEAC0-5B23-41FC-B9A5-2681735F7C65}" type="slidenum">
+              <a:rPr lang="en-US" smtClean="0"/>
+              <a:t>4</a:t>
+            </a:fld>
+            <a:endParaRPr lang="en-US"/>
+          </a:p>
+        </p:txBody>
+      </p:sp>
+      <p:sp>
+        <p:nvSpPr>
+          <p:cNvPr id="4" name="Espace réservé du pied de page 3"/>
+          <p:cNvSpPr>
+            <a:spLocks noGrp="1"/>
+          </p:cNvSpPr>
+          <p:nvPr>
+            <p:ph type="ftr" sz="quarter" idx="4294967295"/>
+          </p:nvPr>
+        </p:nvSpPr>
+        <p:spPr>
+          <a:xfrm>
+            <a:off x="0" y="0"/>
+            <a:ext cx="0" cy="0"/>
+          </a:xfrm>
+        </p:spPr>
+        <p:txBody>
+          <a:bodyPr/>
+          <a:lstStyle/>
+          <a:p>
+            <a:r>
+              <a:rPr lang="en-GB"/>
+              <a:t>Routine SA processing</a:t>
+            </a:r>
+            <a:endParaRPr lang="en-US"/>
+          </a:p>
+        </p:txBody>
+      </p:sp>
+      <p:sp>
+        <p:nvSpPr>
           <p:cNvPr id="5" name="Oval 4"/>
           <p:cNvSpPr/>
           <p:nvPr/>
@@ -7792,7 +8121,7 @@
         <p:spPr>
           <a:xfrm>
             <a:off x="2711624" y="1239143"/>
-            <a:ext cx="2808312" cy="830997"/>
+            <a:ext cx="3467300" cy="461665"/>
           </a:xfrm>
           <a:prstGeom prst="rect">
             <a:avLst/>
@@ -7807,7 +8136,7 @@
           <a:p>
             <a:r>
               <a:rPr lang="fr-BE" sz="2400" dirty="0"/>
-              <a:t>Domain </a:t>
+              <a:t>Reference  </a:t>
             </a:r>
             <a:r>
               <a:rPr lang="fr-BE" sz="2400" dirty="0" err="1"/>
@@ -8531,29 +8860,6 @@
           </a:fontRef>
         </p:style>
       </p:cxnSp>
-      <p:sp>
-        <p:nvSpPr>
-          <p:cNvPr id="4" name="Espace réservé du pied de page 3"/>
-          <p:cNvSpPr>
-            <a:spLocks noGrp="1"/>
-          </p:cNvSpPr>
-          <p:nvPr>
-            <p:ph type="ftr" sz="quarter" idx="11"/>
-          </p:nvPr>
-        </p:nvSpPr>
-        <p:spPr/>
-        <p:txBody>
-          <a:bodyPr/>
-          <a:lstStyle/>
-          <a:p>
-            <a:r>
-              <a:rPr lang="en-GB"/>
-              <a:t>Routine SA processing</a:t>
-            </a:r>
-            <a:endParaRPr lang="en-US"/>
-          </a:p>
-        </p:txBody>
-      </p:sp>
     </p:spTree>
     <p:extLst>
       <p:ext uri="{BB962C8B-B14F-4D97-AF65-F5344CB8AC3E}">
@@ -8617,12 +8923,18 @@
       </p:sp>
       <p:sp>
         <p:nvSpPr>
-          <p:cNvPr id="5" name="Espace réservé du pied de page 4"/>
+          <p:cNvPr id="4" name="Espace réservé du numéro de diapositive 3">
+            <a:extLst>
+              <a:ext uri="{FF2B5EF4-FFF2-40B4-BE49-F238E27FC236}">
+                <a16:creationId xmlns:a16="http://schemas.microsoft.com/office/drawing/2014/main" id="{45ADC2E4-8F19-73CD-9F3D-61E4C35BF1D4}"/>
+              </a:ext>
+            </a:extLst>
+          </p:cNvPr>
           <p:cNvSpPr>
             <a:spLocks noGrp="1"/>
           </p:cNvSpPr>
           <p:nvPr>
-            <p:ph type="ftr" sz="quarter" idx="11"/>
+            <p:ph type="sldNum" idx="12"/>
           </p:nvPr>
         </p:nvSpPr>
         <p:spPr/>
@@ -8630,10 +8942,10 @@
           <a:bodyPr/>
           <a:lstStyle/>
           <a:p>
-            <a:r>
-              <a:rPr lang="en-GB"/>
-              <a:t>Routine SA processing</a:t>
-            </a:r>
+            <a:fld id="{653AEAC0-5B23-41FC-B9A5-2681735F7C65}" type="slidenum">
+              <a:rPr lang="en-US" smtClean="0"/>
+              <a:t>5</a:t>
+            </a:fld>
             <a:endParaRPr lang="en-US"/>
           </a:p>
         </p:txBody>
@@ -8645,12 +8957,17 @@
             <a:graphicFrameLocks noGrp="1"/>
           </p:cNvGraphicFramePr>
           <p:nvPr>
-            <p:ph idx="1"/>
+            <p:ph sz="half" idx="2"/>
+            <p:extLst>
+              <p:ext uri="{D42A27DB-BD31-4B8C-83A1-F6EECF244321}">
+                <p14:modId xmlns:p14="http://schemas.microsoft.com/office/powerpoint/2010/main" val="3612854202"/>
+              </p:ext>
+            </p:extLst>
           </p:nvPr>
         </p:nvGraphicFramePr>
         <p:xfrm>
-          <a:off x="1919536" y="1600200"/>
-          <a:ext cx="4968552" cy="4637112"/>
+          <a:off x="969963" y="1349375"/>
+          <a:ext cx="7777349" cy="4637112"/>
         </p:xfrm>
         <a:graphic>
           <a:graphicData uri="http://schemas.openxmlformats.org/drawingml/2006/table">
@@ -8659,14 +8976,14 @@
                 <a:tableStyleId>{073A0DAA-6AF3-43AB-8588-CEC1D06C72B9}</a:tableStyleId>
               </a:tblPr>
               <a:tblGrid>
-                <a:gridCol w="2520280">
+                <a:gridCol w="4267666">
                   <a:extLst>
                     <a:ext uri="{9D8B030D-6E8A-4147-A177-3AD203B41FA5}">
                       <a16:colId xmlns:a16="http://schemas.microsoft.com/office/drawing/2014/main" val="1899877688"/>
                     </a:ext>
                   </a:extLst>
                 </a:gridCol>
-                <a:gridCol w="2448272">
+                <a:gridCol w="3509683">
                   <a:extLst>
                     <a:ext uri="{9D8B030D-6E8A-4147-A177-3AD203B41FA5}">
                       <a16:colId xmlns:a16="http://schemas.microsoft.com/office/drawing/2014/main" val="4031656552"/>
@@ -9098,6 +9415,34 @@
           </a:graphicData>
         </a:graphic>
       </p:graphicFrame>
+      <p:sp>
+        <p:nvSpPr>
+          <p:cNvPr id="5" name="Espace réservé du pied de page 4"/>
+          <p:cNvSpPr>
+            <a:spLocks noGrp="1"/>
+          </p:cNvSpPr>
+          <p:nvPr>
+            <p:ph type="ftr" sz="quarter" idx="4294967295"/>
+          </p:nvPr>
+        </p:nvSpPr>
+        <p:spPr>
+          <a:xfrm>
+            <a:off x="0" y="0"/>
+            <a:ext cx="0" cy="0"/>
+          </a:xfrm>
+        </p:spPr>
+        <p:txBody>
+          <a:bodyPr/>
+          <a:lstStyle/>
+          <a:p>
+            <a:r>
+              <a:rPr lang="en-GB"/>
+              <a:t>Routine SA processing</a:t>
+            </a:r>
+            <a:endParaRPr lang="en-US"/>
+          </a:p>
+        </p:txBody>
+      </p:sp>
       <p:pic>
         <p:nvPicPr>
           <p:cNvPr id="3" name="Image 2">
@@ -9120,7 +9465,7 @@
         </p:blipFill>
         <p:spPr>
           <a:xfrm>
-            <a:off x="6304815" y="1340768"/>
+            <a:off x="7956908" y="1582814"/>
             <a:ext cx="4235092" cy="1512168"/>
           </a:xfrm>
           <a:prstGeom prst="rect">
@@ -9197,6 +9542,35 @@
       </p:sp>
       <p:sp>
         <p:nvSpPr>
+          <p:cNvPr id="4" name="Espace réservé du numéro de diapositive 3">
+            <a:extLst>
+              <a:ext uri="{FF2B5EF4-FFF2-40B4-BE49-F238E27FC236}">
+                <a16:creationId xmlns:a16="http://schemas.microsoft.com/office/drawing/2014/main" id="{F57A5739-12C5-877F-DD6C-D941A228232E}"/>
+              </a:ext>
+            </a:extLst>
+          </p:cNvPr>
+          <p:cNvSpPr>
+            <a:spLocks noGrp="1"/>
+          </p:cNvSpPr>
+          <p:nvPr>
+            <p:ph type="sldNum" idx="12"/>
+          </p:nvPr>
+        </p:nvSpPr>
+        <p:spPr/>
+        <p:txBody>
+          <a:bodyPr/>
+          <a:lstStyle/>
+          <a:p>
+            <a:fld id="{653AEAC0-5B23-41FC-B9A5-2681735F7C65}" type="slidenum">
+              <a:rPr lang="en-US" smtClean="0"/>
+              <a:t>6</a:t>
+            </a:fld>
+            <a:endParaRPr lang="en-US"/>
+          </a:p>
+        </p:txBody>
+      </p:sp>
+      <p:sp>
+        <p:nvSpPr>
           <p:cNvPr id="3" name="Espace réservé du contenu 2">
             <a:extLst>
               <a:ext uri="{FF2B5EF4-FFF2-40B4-BE49-F238E27FC236}">
@@ -9208,7 +9582,7 @@
             <a:spLocks noGrp="1"/>
           </p:cNvSpPr>
           <p:nvPr>
-            <p:ph idx="1"/>
+            <p:ph sz="half" idx="2"/>
           </p:nvPr>
         </p:nvSpPr>
         <p:spPr/>
@@ -9217,59 +9591,55 @@
           <a:lstStyle/>
           <a:p>
             <a:r>
-              <a:rPr lang="en-GB" dirty="0"/>
+              <a:rPr lang="en-GB" sz="2800" dirty="0"/>
               <a:t>Why?</a:t>
             </a:r>
           </a:p>
           <a:p>
             <a:pPr lvl="1"/>
             <a:r>
-              <a:rPr lang="en-GB" dirty="0"/>
+              <a:rPr lang="en-GB" sz="2400" dirty="0"/>
               <a:t>We want to minimize the revisions (at least in the short term).</a:t>
             </a:r>
           </a:p>
           <a:p>
             <a:pPr lvl="1"/>
             <a:r>
-              <a:rPr lang="en-GB" dirty="0"/>
+              <a:rPr lang="en-GB" sz="2400" dirty="0"/>
               <a:t>Origins of the revisions (decreasing importance)</a:t>
             </a:r>
           </a:p>
           <a:p>
             <a:pPr lvl="2"/>
             <a:r>
-              <a:rPr lang="en-GB" dirty="0"/>
+              <a:rPr lang="en-GB" sz="2000" dirty="0"/>
               <a:t>Structure of the model (outliers, ARIMA…)</a:t>
             </a:r>
           </a:p>
           <a:p>
             <a:pPr lvl="2"/>
             <a:r>
-              <a:rPr lang="en-GB" dirty="0"/>
+              <a:rPr lang="en-GB" sz="2000" dirty="0"/>
               <a:t>Parameters of the ARIMA model (Seats!)</a:t>
             </a:r>
           </a:p>
           <a:p>
             <a:pPr lvl="2"/>
             <a:r>
-              <a:rPr lang="en-GB" dirty="0"/>
+              <a:rPr lang="en-GB" sz="2000" dirty="0"/>
               <a:t>Coefficients of the regression variables</a:t>
             </a:r>
           </a:p>
           <a:p>
             <a:pPr lvl="2"/>
             <a:r>
-              <a:rPr lang="en-GB" dirty="0"/>
-              <a:t>News (forecasts ≠ actual data) →use forecasted seasonal factors or AO (fixed for revisions, free for </a:t>
-            </a:r>
-            <a:r>
-              <a:rPr lang="en-GB"/>
-              <a:t>new observations)</a:t>
+              <a:rPr lang="en-GB" sz="2000" dirty="0"/>
+              <a:t>News (forecasts ≠ actual data) →use forecasted seasonal factors or AO (fixed for revisions, free for new observations)</a:t>
             </a:r>
           </a:p>
           <a:p>
             <a:pPr lvl="2"/>
-            <a:endParaRPr lang="en-GB" dirty="0"/>
+            <a:endParaRPr lang="en-GB" sz="2000" dirty="0"/>
           </a:p>
           <a:p>
             <a:pPr lvl="2"/>
@@ -9300,10 +9670,15 @@
             <a:spLocks noGrp="1"/>
           </p:cNvSpPr>
           <p:nvPr>
-            <p:ph type="ftr" sz="quarter" idx="11"/>
+            <p:ph type="ftr" sz="quarter" idx="4294967295"/>
           </p:nvPr>
         </p:nvSpPr>
-        <p:spPr/>
+        <p:spPr>
+          <a:xfrm>
+            <a:off x="0" y="0"/>
+            <a:ext cx="0" cy="0"/>
+          </a:xfrm>
+        </p:spPr>
         <p:txBody>
           <a:bodyPr/>
           <a:lstStyle/>
@@ -9371,12 +9746,18 @@
       </p:sp>
       <p:sp>
         <p:nvSpPr>
-          <p:cNvPr id="3" name="Content Placeholder 2"/>
+          <p:cNvPr id="4" name="Espace réservé du numéro de diapositive 3">
+            <a:extLst>
+              <a:ext uri="{FF2B5EF4-FFF2-40B4-BE49-F238E27FC236}">
+                <a16:creationId xmlns:a16="http://schemas.microsoft.com/office/drawing/2014/main" id="{56C4A2B5-9BAE-59D7-DF63-66D3DE061B26}"/>
+              </a:ext>
+            </a:extLst>
+          </p:cNvPr>
           <p:cNvSpPr>
             <a:spLocks noGrp="1"/>
           </p:cNvSpPr>
           <p:nvPr>
-            <p:ph idx="1"/>
+            <p:ph type="sldNum" idx="12"/>
           </p:nvPr>
         </p:nvSpPr>
         <p:spPr/>
@@ -9384,132 +9765,155 @@
           <a:bodyPr/>
           <a:lstStyle/>
           <a:p>
-            <a:r>
-              <a:rPr lang="fr-BE" dirty="0" err="1"/>
+            <a:fld id="{653AEAC0-5B23-41FC-B9A5-2681735F7C65}" type="slidenum">
+              <a:rPr lang="en-US" smtClean="0"/>
+              <a:t>7</a:t>
+            </a:fld>
+            <a:endParaRPr lang="en-US"/>
+          </a:p>
+        </p:txBody>
+      </p:sp>
+      <p:sp>
+        <p:nvSpPr>
+          <p:cNvPr id="3" name="Content Placeholder 2"/>
+          <p:cNvSpPr>
+            <a:spLocks noGrp="1"/>
+          </p:cNvSpPr>
+          <p:nvPr>
+            <p:ph sz="half" idx="2"/>
+          </p:nvPr>
+        </p:nvSpPr>
+        <p:spPr/>
+        <p:txBody>
+          <a:bodyPr/>
+          <a:lstStyle/>
+          <a:p>
+            <a:r>
+              <a:rPr lang="fr-BE" sz="2800" dirty="0" err="1"/>
               <a:t>Suitable</a:t>
             </a:r>
             <a:r>
-              <a:rPr lang="fr-BE" dirty="0"/>
+              <a:rPr lang="fr-BE" sz="2800" dirty="0"/>
               <a:t> for sets &lt; 3000 </a:t>
             </a:r>
             <a:r>
-              <a:rPr lang="fr-BE" dirty="0" err="1"/>
+              <a:rPr lang="fr-BE" sz="2800" dirty="0" err="1"/>
               <a:t>series</a:t>
             </a:r>
-            <a:endParaRPr lang="fr-BE" dirty="0"/>
-          </a:p>
-          <a:p>
-            <a:r>
-              <a:rPr lang="fr-BE" dirty="0" err="1"/>
+            <a:endParaRPr lang="fr-BE" sz="2800" dirty="0"/>
+          </a:p>
+          <a:p>
+            <a:r>
+              <a:rPr lang="fr-BE" sz="2800" dirty="0" err="1"/>
               <a:t>Steps</a:t>
             </a:r>
-            <a:endParaRPr lang="fr-BE" dirty="0"/>
+            <a:endParaRPr lang="fr-BE" sz="2800" dirty="0"/>
           </a:p>
           <a:p>
             <a:pPr lvl="1"/>
             <a:r>
-              <a:rPr lang="fr-BE" dirty="0" err="1"/>
+              <a:rPr lang="fr-BE" sz="2400" dirty="0" err="1"/>
               <a:t>Initialization</a:t>
             </a:r>
-            <a:endParaRPr lang="fr-BE" dirty="0"/>
+            <a:endParaRPr lang="fr-BE" sz="2400" dirty="0"/>
           </a:p>
           <a:p>
             <a:pPr lvl="2"/>
             <a:r>
-              <a:rPr lang="fr-BE" dirty="0" err="1"/>
+              <a:rPr lang="fr-BE" sz="2000" dirty="0" err="1"/>
               <a:t>Define</a:t>
             </a:r>
             <a:r>
-              <a:rPr lang="fr-BE" dirty="0"/>
+              <a:rPr lang="fr-BE" sz="2000" dirty="0"/>
               <a:t> the default </a:t>
             </a:r>
             <a:r>
-              <a:rPr lang="fr-BE" dirty="0" err="1"/>
+              <a:rPr lang="fr-BE" sz="2000" dirty="0" err="1"/>
               <a:t>specification</a:t>
             </a:r>
             <a:r>
-              <a:rPr lang="fr-BE" dirty="0"/>
+              <a:rPr lang="fr-BE" sz="2000" dirty="0"/>
               <a:t> (or use an </a:t>
             </a:r>
             <a:r>
-              <a:rPr lang="fr-BE" dirty="0" err="1"/>
+              <a:rPr lang="fr-BE" sz="2000" dirty="0" err="1"/>
               <a:t>existing</a:t>
             </a:r>
             <a:r>
-              <a:rPr lang="fr-BE" dirty="0"/>
+              <a:rPr lang="fr-BE" sz="2000" dirty="0"/>
               <a:t> one)</a:t>
             </a:r>
           </a:p>
           <a:p>
             <a:pPr lvl="2"/>
             <a:r>
-              <a:rPr lang="fr-BE" dirty="0" err="1"/>
+              <a:rPr lang="fr-BE" sz="2000" dirty="0" err="1"/>
               <a:t>Modify</a:t>
             </a:r>
             <a:r>
-              <a:rPr lang="fr-BE" dirty="0"/>
+              <a:rPr lang="fr-BE" sz="2000" dirty="0"/>
               <a:t> </a:t>
             </a:r>
             <a:r>
-              <a:rPr lang="fr-BE" dirty="0" err="1"/>
+              <a:rPr lang="fr-BE" sz="2000" dirty="0" err="1"/>
               <a:t>some</a:t>
             </a:r>
             <a:r>
-              <a:rPr lang="fr-BE" dirty="0"/>
+              <a:rPr lang="fr-BE" sz="2000" dirty="0"/>
               <a:t> </a:t>
             </a:r>
             <a:r>
-              <a:rPr lang="fr-BE" dirty="0" err="1"/>
+              <a:rPr lang="fr-BE" sz="2000" dirty="0" err="1"/>
               <a:t>specifications</a:t>
             </a:r>
             <a:r>
-              <a:rPr lang="fr-BE" dirty="0"/>
+              <a:rPr lang="fr-BE" sz="2000" dirty="0"/>
               <a:t> (</a:t>
             </a:r>
             <a:r>
-              <a:rPr lang="fr-BE" dirty="0" err="1"/>
+              <a:rPr lang="fr-BE" sz="2000" dirty="0" err="1"/>
               <a:t>keep</a:t>
             </a:r>
             <a:r>
-              <a:rPr lang="fr-BE" dirty="0"/>
+              <a:rPr lang="fr-BE" sz="2000" dirty="0"/>
               <a:t> </a:t>
             </a:r>
             <a:r>
-              <a:rPr lang="fr-BE" dirty="0" err="1"/>
+              <a:rPr lang="fr-BE" sz="2000" dirty="0" err="1"/>
               <a:t>them</a:t>
             </a:r>
             <a:r>
-              <a:rPr lang="fr-BE" dirty="0"/>
+              <a:rPr lang="fr-BE" sz="2000" dirty="0"/>
               <a:t> « large »)</a:t>
             </a:r>
           </a:p>
           <a:p>
             <a:pPr lvl="2"/>
             <a:r>
-              <a:rPr lang="fr-BE" dirty="0" err="1"/>
+              <a:rPr lang="fr-BE" sz="2000" dirty="0" err="1"/>
               <a:t>Generate</a:t>
             </a:r>
             <a:r>
-              <a:rPr lang="fr-BE" dirty="0"/>
+              <a:rPr lang="fr-BE" sz="2000" dirty="0"/>
               <a:t> and export the </a:t>
             </a:r>
             <a:r>
-              <a:rPr lang="fr-BE" dirty="0" err="1"/>
+              <a:rPr lang="fr-BE" sz="2000" dirty="0" err="1"/>
               <a:t>results</a:t>
             </a:r>
-            <a:endParaRPr lang="fr-BE" dirty="0"/>
+            <a:endParaRPr lang="fr-BE" sz="2000" dirty="0"/>
           </a:p>
           <a:p>
             <a:pPr lvl="2"/>
             <a:r>
-              <a:rPr lang="fr-BE" dirty="0"/>
+              <a:rPr lang="fr-BE" sz="2000" dirty="0"/>
               <a:t>Save the </a:t>
             </a:r>
             <a:r>
-              <a:rPr lang="fr-BE" dirty="0" err="1"/>
+              <a:rPr lang="fr-BE" sz="2000" dirty="0" err="1"/>
               <a:t>processing</a:t>
             </a:r>
-            <a:endParaRPr lang="fr-BE" dirty="0"/>
+            <a:endParaRPr lang="fr-BE" sz="2000" dirty="0"/>
           </a:p>
         </p:txBody>
       </p:sp>
@@ -9520,10 +9924,15 @@
             <a:spLocks noGrp="1"/>
           </p:cNvSpPr>
           <p:nvPr>
-            <p:ph type="ftr" sz="quarter" idx="11"/>
+            <p:ph type="ftr" sz="quarter" idx="4294967295"/>
           </p:nvPr>
         </p:nvSpPr>
-        <p:spPr/>
+        <p:spPr>
+          <a:xfrm>
+            <a:off x="0" y="0"/>
+            <a:ext cx="0" cy="0"/>
+          </a:xfrm>
+        </p:spPr>
         <p:txBody>
           <a:bodyPr/>
           <a:lstStyle/>
@@ -9591,12 +10000,18 @@
       </p:sp>
       <p:sp>
         <p:nvSpPr>
-          <p:cNvPr id="3" name="Content Placeholder 2"/>
+          <p:cNvPr id="4" name="Espace réservé du numéro de diapositive 3">
+            <a:extLst>
+              <a:ext uri="{FF2B5EF4-FFF2-40B4-BE49-F238E27FC236}">
+                <a16:creationId xmlns:a16="http://schemas.microsoft.com/office/drawing/2014/main" id="{944E38A0-754D-8C1B-C997-49F4A7BE7E33}"/>
+              </a:ext>
+            </a:extLst>
+          </p:cNvPr>
           <p:cNvSpPr>
             <a:spLocks noGrp="1"/>
           </p:cNvSpPr>
           <p:nvPr>
-            <p:ph idx="1"/>
+            <p:ph type="sldNum" idx="12"/>
           </p:nvPr>
         </p:nvSpPr>
         <p:spPr/>
@@ -9604,264 +10019,286 @@
           <a:bodyPr/>
           <a:lstStyle/>
           <a:p>
+            <a:fld id="{653AEAC0-5B23-41FC-B9A5-2681735F7C65}" type="slidenum">
+              <a:rPr lang="en-US" smtClean="0"/>
+              <a:t>8</a:t>
+            </a:fld>
+            <a:endParaRPr lang="en-US"/>
+          </a:p>
+        </p:txBody>
+      </p:sp>
+      <p:sp>
+        <p:nvSpPr>
+          <p:cNvPr id="3" name="Content Placeholder 2"/>
+          <p:cNvSpPr>
+            <a:spLocks noGrp="1"/>
+          </p:cNvSpPr>
+          <p:nvPr>
+            <p:ph sz="half" idx="2"/>
+          </p:nvPr>
+        </p:nvSpPr>
+        <p:spPr/>
+        <p:txBody>
+          <a:bodyPr/>
+          <a:lstStyle/>
+          <a:p>
             <a:pPr lvl="1"/>
             <a:r>
-              <a:rPr lang="fr-BE" dirty="0" err="1"/>
+              <a:rPr lang="fr-BE" sz="2400" dirty="0" err="1"/>
               <a:t>Next</a:t>
             </a:r>
             <a:r>
-              <a:rPr lang="fr-BE" dirty="0"/>
+              <a:rPr lang="fr-BE" sz="2400" dirty="0"/>
               <a:t> estimations</a:t>
             </a:r>
           </a:p>
           <a:p>
             <a:pPr lvl="2"/>
             <a:r>
-              <a:rPr lang="fr-BE" dirty="0" err="1"/>
+              <a:rPr lang="fr-BE" sz="2000" dirty="0" err="1"/>
               <a:t>Re-load</a:t>
             </a:r>
             <a:r>
-              <a:rPr lang="fr-BE" dirty="0"/>
+              <a:rPr lang="fr-BE" sz="2000" dirty="0"/>
               <a:t> the </a:t>
             </a:r>
             <a:r>
-              <a:rPr lang="fr-BE" dirty="0" err="1"/>
+              <a:rPr lang="fr-BE" sz="2000" dirty="0" err="1"/>
               <a:t>workspace</a:t>
             </a:r>
-            <a:endParaRPr lang="fr-BE" dirty="0"/>
+            <a:endParaRPr lang="fr-BE" sz="2000" dirty="0"/>
           </a:p>
           <a:p>
             <a:pPr lvl="2"/>
             <a:r>
-              <a:rPr lang="fr-BE" dirty="0" err="1"/>
+              <a:rPr lang="fr-BE" sz="2000" dirty="0" err="1"/>
               <a:t>Refresh</a:t>
             </a:r>
             <a:r>
-              <a:rPr lang="fr-BE" dirty="0"/>
+              <a:rPr lang="fr-BE" sz="2000" dirty="0"/>
               <a:t> the </a:t>
             </a:r>
             <a:r>
-              <a:rPr lang="fr-BE" dirty="0" err="1"/>
+              <a:rPr lang="fr-BE" sz="2000" dirty="0" err="1"/>
               <a:t>processing</a:t>
             </a:r>
             <a:r>
-              <a:rPr lang="fr-BE" dirty="0"/>
+              <a:rPr lang="fr-BE" sz="2000" dirty="0"/>
               <a:t> (for instance)</a:t>
             </a:r>
           </a:p>
           <a:p>
             <a:pPr lvl="3"/>
             <a:r>
-              <a:rPr lang="fr-BE" dirty="0"/>
+              <a:rPr lang="fr-BE" sz="1800" dirty="0"/>
               <a:t>For normal </a:t>
             </a:r>
             <a:r>
-              <a:rPr lang="fr-BE" dirty="0" err="1"/>
+              <a:rPr lang="fr-BE" sz="1800" dirty="0" err="1"/>
               <a:t>re</a:t>
             </a:r>
             <a:r>
-              <a:rPr lang="fr-BE" dirty="0"/>
+              <a:rPr lang="fr-BE" sz="1800" dirty="0"/>
               <a:t>-estimation, </a:t>
             </a:r>
             <a:r>
-              <a:rPr lang="fr-BE" dirty="0" err="1"/>
+              <a:rPr lang="fr-BE" sz="1800" dirty="0" err="1"/>
               <a:t>refresh</a:t>
             </a:r>
             <a:r>
-              <a:rPr lang="fr-BE" dirty="0"/>
+              <a:rPr lang="fr-BE" sz="1800" dirty="0"/>
               <a:t> </a:t>
             </a:r>
             <a:r>
-              <a:rPr lang="fr-BE" dirty="0" err="1"/>
+              <a:rPr lang="fr-BE" sz="1800" dirty="0" err="1"/>
               <a:t>only</a:t>
             </a:r>
             <a:r>
-              <a:rPr lang="fr-BE" dirty="0"/>
+              <a:rPr lang="fr-BE" sz="1800" dirty="0"/>
               <a:t> the </a:t>
             </a:r>
             <a:r>
-              <a:rPr lang="fr-BE" dirty="0" err="1"/>
+              <a:rPr lang="fr-BE" sz="1800" dirty="0" err="1"/>
               <a:t>parameters</a:t>
             </a:r>
             <a:r>
-              <a:rPr lang="fr-BE" dirty="0"/>
+              <a:rPr lang="fr-BE" sz="1800" dirty="0"/>
               <a:t> </a:t>
             </a:r>
           </a:p>
           <a:p>
             <a:pPr lvl="3"/>
             <a:r>
-              <a:rPr lang="fr-BE" dirty="0" err="1"/>
+              <a:rPr lang="fr-BE" sz="1800" dirty="0" err="1"/>
               <a:t>Refresh</a:t>
             </a:r>
             <a:r>
-              <a:rPr lang="fr-BE" dirty="0"/>
+              <a:rPr lang="fr-BE" sz="1800" dirty="0"/>
               <a:t> the model once </a:t>
             </a:r>
             <a:r>
-              <a:rPr lang="fr-BE" dirty="0" err="1"/>
+              <a:rPr lang="fr-BE" sz="1800" dirty="0" err="1"/>
               <a:t>each</a:t>
             </a:r>
             <a:r>
-              <a:rPr lang="fr-BE" dirty="0"/>
+              <a:rPr lang="fr-BE" sz="1800" dirty="0"/>
               <a:t> </a:t>
             </a:r>
             <a:r>
-              <a:rPr lang="fr-BE" dirty="0" err="1"/>
+              <a:rPr lang="fr-BE" sz="1800" dirty="0" err="1"/>
               <a:t>year</a:t>
             </a:r>
             <a:r>
-              <a:rPr lang="fr-BE" dirty="0"/>
+              <a:rPr lang="fr-BE" sz="1800" dirty="0"/>
               <a:t> (or </a:t>
             </a:r>
             <a:r>
-              <a:rPr lang="fr-BE" dirty="0" err="1"/>
+              <a:rPr lang="fr-BE" sz="1800" dirty="0" err="1"/>
               <a:t>each</a:t>
             </a:r>
             <a:r>
-              <a:rPr lang="fr-BE" dirty="0"/>
+              <a:rPr lang="fr-BE" sz="1800" dirty="0"/>
               <a:t> </a:t>
             </a:r>
             <a:r>
-              <a:rPr lang="fr-BE" dirty="0" err="1"/>
+              <a:rPr lang="fr-BE" sz="1800" dirty="0" err="1"/>
               <a:t>two</a:t>
             </a:r>
             <a:r>
-              <a:rPr lang="fr-BE" dirty="0"/>
+              <a:rPr lang="fr-BE" sz="1800" dirty="0"/>
               <a:t> </a:t>
             </a:r>
             <a:r>
-              <a:rPr lang="fr-BE" dirty="0" err="1"/>
+              <a:rPr lang="fr-BE" sz="1800" dirty="0" err="1"/>
               <a:t>years</a:t>
             </a:r>
             <a:r>
-              <a:rPr lang="fr-BE"/>
+              <a:rPr lang="fr-BE" sz="1800" dirty="0"/>
               <a:t>)</a:t>
             </a:r>
-            <a:endParaRPr lang="fr-BE" dirty="0"/>
           </a:p>
           <a:p>
             <a:pPr lvl="3"/>
             <a:r>
-              <a:rPr lang="fr-BE" dirty="0" err="1"/>
+              <a:rPr lang="fr-BE" sz="1800" dirty="0" err="1"/>
               <a:t>Inspect</a:t>
             </a:r>
             <a:r>
-              <a:rPr lang="fr-BE" dirty="0"/>
+              <a:rPr lang="fr-BE" sz="1800" dirty="0"/>
               <a:t> the </a:t>
             </a:r>
             <a:r>
-              <a:rPr lang="fr-BE" dirty="0" err="1"/>
+              <a:rPr lang="fr-BE" sz="1800" dirty="0" err="1"/>
               <a:t>results</a:t>
             </a:r>
             <a:r>
-              <a:rPr lang="fr-BE" dirty="0"/>
+              <a:rPr lang="fr-BE" sz="1800" dirty="0"/>
               <a:t> and </a:t>
             </a:r>
             <a:r>
-              <a:rPr lang="fr-BE" dirty="0" err="1"/>
+              <a:rPr lang="fr-BE" sz="1800" dirty="0" err="1"/>
               <a:t>modify</a:t>
             </a:r>
             <a:r>
-              <a:rPr lang="fr-BE" dirty="0"/>
+              <a:rPr lang="fr-BE" sz="1800" dirty="0"/>
               <a:t> </a:t>
             </a:r>
             <a:r>
-              <a:rPr lang="fr-BE" dirty="0" err="1"/>
+              <a:rPr lang="fr-BE" sz="1800" dirty="0" err="1"/>
               <a:t>them</a:t>
             </a:r>
             <a:r>
-              <a:rPr lang="fr-BE" dirty="0"/>
+              <a:rPr lang="fr-BE" sz="1800" dirty="0"/>
               <a:t> if </a:t>
             </a:r>
             <a:r>
-              <a:rPr lang="fr-BE" dirty="0" err="1"/>
+              <a:rPr lang="fr-BE" sz="1800" dirty="0" err="1"/>
               <a:t>need</a:t>
             </a:r>
             <a:r>
-              <a:rPr lang="fr-BE" dirty="0"/>
+              <a:rPr lang="fr-BE" sz="1800" dirty="0"/>
               <a:t> </a:t>
             </a:r>
             <a:r>
-              <a:rPr lang="fr-BE" dirty="0" err="1"/>
+              <a:rPr lang="fr-BE" sz="1800" dirty="0" err="1"/>
               <a:t>be</a:t>
             </a:r>
             <a:r>
-              <a:rPr lang="fr-BE" dirty="0"/>
+              <a:rPr lang="fr-BE" sz="1800" dirty="0"/>
               <a:t> (</a:t>
             </a:r>
             <a:r>
-              <a:rPr lang="fr-BE" dirty="0" err="1"/>
+              <a:rPr lang="fr-BE" sz="1800" dirty="0" err="1"/>
               <a:t>will</a:t>
             </a:r>
             <a:r>
-              <a:rPr lang="fr-BE" dirty="0"/>
+              <a:rPr lang="fr-BE" sz="1800" dirty="0"/>
               <a:t> </a:t>
             </a:r>
             <a:r>
-              <a:rPr lang="fr-BE" dirty="0" err="1"/>
+              <a:rPr lang="fr-BE" sz="1800" dirty="0" err="1"/>
               <a:t>modify</a:t>
             </a:r>
             <a:r>
-              <a:rPr lang="fr-BE" dirty="0"/>
+              <a:rPr lang="fr-BE" sz="1800" dirty="0"/>
               <a:t> </a:t>
             </a:r>
             <a:r>
-              <a:rPr lang="fr-BE" dirty="0" err="1"/>
+              <a:rPr lang="fr-BE" sz="1800" dirty="0" err="1"/>
               <a:t>some</a:t>
             </a:r>
             <a:r>
-              <a:rPr lang="fr-BE" dirty="0"/>
+              <a:rPr lang="fr-BE" sz="1800" dirty="0"/>
               <a:t> « </a:t>
             </a:r>
             <a:r>
-              <a:rPr lang="fr-BE" dirty="0" err="1"/>
+              <a:rPr lang="fr-BE" sz="1800" dirty="0" err="1"/>
               <a:t>domain</a:t>
             </a:r>
             <a:r>
-              <a:rPr lang="fr-BE" dirty="0"/>
+              <a:rPr lang="fr-BE" sz="1800" dirty="0"/>
               <a:t> </a:t>
             </a:r>
             <a:r>
-              <a:rPr lang="fr-BE" dirty="0" err="1"/>
+              <a:rPr lang="fr-BE" sz="1800" dirty="0" err="1"/>
               <a:t>specifications</a:t>
             </a:r>
             <a:r>
-              <a:rPr lang="fr-BE" dirty="0"/>
+              <a:rPr lang="fr-BE" sz="1800" dirty="0"/>
               <a:t> » </a:t>
             </a:r>
           </a:p>
           <a:p>
             <a:pPr lvl="2"/>
             <a:r>
-              <a:rPr lang="fr-BE" dirty="0"/>
+              <a:rPr lang="fr-BE" sz="2000" dirty="0"/>
               <a:t>Exports the </a:t>
             </a:r>
             <a:r>
-              <a:rPr lang="fr-BE" dirty="0" err="1"/>
+              <a:rPr lang="fr-BE" sz="2000" dirty="0" err="1"/>
               <a:t>results</a:t>
             </a:r>
             <a:r>
-              <a:rPr lang="fr-BE" dirty="0"/>
+              <a:rPr lang="fr-BE" sz="2000" dirty="0"/>
               <a:t> and </a:t>
             </a:r>
             <a:r>
-              <a:rPr lang="fr-BE" dirty="0" err="1"/>
+              <a:rPr lang="fr-BE" sz="2000" dirty="0" err="1"/>
               <a:t>save</a:t>
             </a:r>
             <a:r>
-              <a:rPr lang="fr-BE" dirty="0"/>
+              <a:rPr lang="fr-BE" sz="2000" dirty="0"/>
               <a:t> the </a:t>
             </a:r>
             <a:r>
-              <a:rPr lang="fr-BE" dirty="0" err="1"/>
+              <a:rPr lang="fr-BE" sz="2000" dirty="0" err="1"/>
               <a:t>workspace</a:t>
             </a:r>
             <a:r>
-              <a:rPr lang="fr-BE" dirty="0"/>
+              <a:rPr lang="fr-BE" sz="2000" dirty="0"/>
               <a:t>.</a:t>
             </a:r>
-            <a:endParaRPr lang="en-US" dirty="0"/>
+            <a:endParaRPr lang="en-US" sz="2000" dirty="0"/>
           </a:p>
           <a:p>
             <a:endParaRPr lang="en-US" dirty="0"/>
@@ -9875,10 +10312,15 @@
             <a:spLocks noGrp="1"/>
           </p:cNvSpPr>
           <p:nvPr>
-            <p:ph type="ftr" sz="quarter" idx="11"/>
+            <p:ph type="ftr" sz="quarter" idx="4294967295"/>
           </p:nvPr>
         </p:nvSpPr>
-        <p:spPr/>
+        <p:spPr>
+          <a:xfrm>
+            <a:off x="0" y="0"/>
+            <a:ext cx="0" cy="0"/>
+          </a:xfrm>
+        </p:spPr>
         <p:txBody>
           <a:bodyPr/>
           <a:lstStyle/>
@@ -9950,12 +10392,41 @@
       </p:sp>
       <p:sp>
         <p:nvSpPr>
+          <p:cNvPr id="4" name="Espace réservé du numéro de diapositive 3">
+            <a:extLst>
+              <a:ext uri="{FF2B5EF4-FFF2-40B4-BE49-F238E27FC236}">
+                <a16:creationId xmlns:a16="http://schemas.microsoft.com/office/drawing/2014/main" id="{3412D562-7E77-8641-6369-ADB6C0525095}"/>
+              </a:ext>
+            </a:extLst>
+          </p:cNvPr>
+          <p:cNvSpPr>
+            <a:spLocks noGrp="1"/>
+          </p:cNvSpPr>
+          <p:nvPr>
+            <p:ph type="sldNum" idx="12"/>
+          </p:nvPr>
+        </p:nvSpPr>
+        <p:spPr/>
+        <p:txBody>
+          <a:bodyPr/>
+          <a:lstStyle/>
+          <a:p>
+            <a:fld id="{653AEAC0-5B23-41FC-B9A5-2681735F7C65}" type="slidenum">
+              <a:rPr lang="en-US" smtClean="0"/>
+              <a:t>9</a:t>
+            </a:fld>
+            <a:endParaRPr lang="en-US"/>
+          </a:p>
+        </p:txBody>
+      </p:sp>
+      <p:sp>
+        <p:nvSpPr>
           <p:cNvPr id="3" name="Content Placeholder 2"/>
           <p:cNvSpPr>
             <a:spLocks noGrp="1"/>
           </p:cNvSpPr>
           <p:nvPr>
-            <p:ph idx="1"/>
+            <p:ph sz="half" idx="2"/>
           </p:nvPr>
         </p:nvSpPr>
         <p:spPr/>
@@ -9966,157 +10437,157 @@
           <a:lstStyle/>
           <a:p>
             <a:r>
-              <a:rPr lang="fr-BE" dirty="0" err="1"/>
+              <a:rPr lang="fr-BE" sz="2800" dirty="0" err="1"/>
               <a:t>Suitable</a:t>
             </a:r>
             <a:r>
-              <a:rPr lang="fr-BE" dirty="0"/>
+              <a:rPr lang="fr-BE" sz="2800" dirty="0"/>
               <a:t> for </a:t>
             </a:r>
             <a:r>
-              <a:rPr lang="fr-BE" dirty="0" err="1"/>
+              <a:rPr lang="fr-BE" sz="2800" dirty="0" err="1"/>
               <a:t>any</a:t>
             </a:r>
             <a:r>
-              <a:rPr lang="fr-BE" dirty="0"/>
+              <a:rPr lang="fr-BE" sz="2800" dirty="0"/>
               <a:t> </a:t>
             </a:r>
             <a:r>
-              <a:rPr lang="fr-BE" dirty="0" err="1"/>
+              <a:rPr lang="fr-BE" sz="2800" dirty="0" err="1"/>
               <a:t>number</a:t>
             </a:r>
             <a:r>
-              <a:rPr lang="fr-BE" dirty="0"/>
+              <a:rPr lang="fr-BE" sz="2800" dirty="0"/>
               <a:t> of </a:t>
             </a:r>
             <a:r>
-              <a:rPr lang="fr-BE" dirty="0" err="1"/>
+              <a:rPr lang="fr-BE" sz="2800" dirty="0" err="1"/>
               <a:t>series</a:t>
             </a:r>
             <a:r>
-              <a:rPr lang="fr-BE" dirty="0"/>
+              <a:rPr lang="fr-BE" sz="2800" dirty="0"/>
               <a:t> (split the </a:t>
             </a:r>
             <a:r>
-              <a:rPr lang="fr-BE" dirty="0" err="1"/>
+              <a:rPr lang="fr-BE" sz="2800" dirty="0" err="1"/>
               <a:t>workspace</a:t>
             </a:r>
             <a:r>
-              <a:rPr lang="fr-BE" dirty="0"/>
+              <a:rPr lang="fr-BE" sz="2800" dirty="0"/>
               <a:t> </a:t>
             </a:r>
             <a:r>
-              <a:rPr lang="fr-BE" dirty="0" err="1"/>
+              <a:rPr lang="fr-BE" sz="2800" dirty="0" err="1"/>
               <a:t>is</a:t>
             </a:r>
             <a:r>
-              <a:rPr lang="fr-BE" dirty="0"/>
+              <a:rPr lang="fr-BE" sz="2800" dirty="0"/>
               <a:t> </a:t>
             </a:r>
             <a:r>
-              <a:rPr lang="fr-BE" dirty="0" err="1"/>
+              <a:rPr lang="fr-BE" sz="2800" dirty="0" err="1"/>
               <a:t>several</a:t>
             </a:r>
             <a:r>
-              <a:rPr lang="fr-BE" dirty="0"/>
+              <a:rPr lang="fr-BE" sz="2800" dirty="0"/>
               <a:t> </a:t>
             </a:r>
             <a:r>
-              <a:rPr lang="fr-BE" dirty="0" err="1"/>
+              <a:rPr lang="fr-BE" sz="2800" dirty="0" err="1"/>
               <a:t>SAProcessing</a:t>
             </a:r>
             <a:r>
-              <a:rPr lang="fr-BE" dirty="0"/>
+              <a:rPr lang="fr-BE" sz="2800" dirty="0"/>
               <a:t>) if </a:t>
             </a:r>
             <a:r>
-              <a:rPr lang="fr-BE" dirty="0" err="1"/>
+              <a:rPr lang="fr-BE" sz="2800" dirty="0" err="1"/>
               <a:t>need</a:t>
             </a:r>
             <a:r>
-              <a:rPr lang="fr-BE" dirty="0"/>
+              <a:rPr lang="fr-BE" sz="2800" dirty="0"/>
               <a:t> </a:t>
             </a:r>
             <a:r>
-              <a:rPr lang="fr-BE" dirty="0" err="1"/>
+              <a:rPr lang="fr-BE" sz="2800" dirty="0" err="1"/>
               <a:t>be</a:t>
             </a:r>
-            <a:endParaRPr lang="fr-BE" dirty="0"/>
-          </a:p>
-          <a:p>
-            <a:r>
-              <a:rPr lang="fr-BE" dirty="0" err="1"/>
+            <a:endParaRPr lang="fr-BE" sz="2800" dirty="0"/>
+          </a:p>
+          <a:p>
+            <a:r>
+              <a:rPr lang="fr-BE" sz="2800" dirty="0" err="1"/>
               <a:t>Steps</a:t>
             </a:r>
-            <a:endParaRPr lang="fr-BE" dirty="0"/>
+            <a:endParaRPr lang="fr-BE" sz="2800" dirty="0"/>
           </a:p>
           <a:p>
             <a:pPr lvl="1"/>
             <a:r>
-              <a:rPr lang="fr-BE" dirty="0" err="1"/>
+              <a:rPr lang="fr-BE" sz="2400" dirty="0" err="1"/>
               <a:t>Initialization</a:t>
             </a:r>
             <a:r>
-              <a:rPr lang="fr-BE" dirty="0"/>
+              <a:rPr lang="fr-BE" sz="2400" dirty="0"/>
               <a:t>: </a:t>
             </a:r>
           </a:p>
           <a:p>
             <a:pPr lvl="2"/>
             <a:r>
-              <a:rPr lang="fr-BE" dirty="0" err="1"/>
+              <a:rPr lang="fr-BE" sz="2000" dirty="0" err="1"/>
               <a:t>generate</a:t>
             </a:r>
             <a:r>
-              <a:rPr lang="fr-BE" dirty="0"/>
+              <a:rPr lang="fr-BE" sz="2000" dirty="0"/>
               <a:t> the input file (=</a:t>
             </a:r>
             <a:r>
-              <a:rPr lang="fr-BE" dirty="0" err="1"/>
+              <a:rPr lang="fr-BE" sz="2000" dirty="0" err="1"/>
               <a:t>workspace</a:t>
             </a:r>
             <a:r>
-              <a:rPr lang="fr-BE" dirty="0"/>
+              <a:rPr lang="fr-BE" sz="2000" dirty="0"/>
               <a:t>), </a:t>
             </a:r>
             <a:r>
-              <a:rPr lang="fr-BE" dirty="0" err="1"/>
+              <a:rPr lang="fr-BE" sz="2000" dirty="0" err="1"/>
               <a:t>using</a:t>
             </a:r>
             <a:r>
-              <a:rPr lang="fr-BE" dirty="0"/>
+              <a:rPr lang="fr-BE" sz="2000" dirty="0"/>
               <a:t> the GUI (</a:t>
             </a:r>
             <a:r>
-              <a:rPr lang="fr-BE" dirty="0" err="1"/>
+              <a:rPr lang="fr-BE" sz="2000" dirty="0" err="1"/>
               <a:t>don’t</a:t>
             </a:r>
             <a:r>
-              <a:rPr lang="fr-BE" dirty="0"/>
+              <a:rPr lang="fr-BE" sz="2000" dirty="0"/>
               <a:t> </a:t>
             </a:r>
             <a:r>
-              <a:rPr lang="fr-BE" dirty="0" err="1"/>
+              <a:rPr lang="fr-BE" sz="2000" dirty="0" err="1"/>
               <a:t>process</a:t>
             </a:r>
             <a:r>
-              <a:rPr lang="fr-BE" dirty="0"/>
+              <a:rPr lang="fr-BE" sz="2000" dirty="0"/>
               <a:t> the multi-</a:t>
             </a:r>
             <a:r>
-              <a:rPr lang="fr-BE" dirty="0" err="1"/>
+              <a:rPr lang="fr-BE" sz="2000" dirty="0" err="1"/>
               <a:t>processing</a:t>
             </a:r>
             <a:r>
-              <a:rPr lang="fr-BE" dirty="0"/>
+              <a:rPr lang="fr-BE" sz="2000" dirty="0"/>
               <a:t>) or </a:t>
             </a:r>
             <a:r>
-              <a:rPr lang="fr-BE" dirty="0" err="1"/>
+              <a:rPr lang="fr-BE" sz="2000" dirty="0" err="1"/>
               <a:t>using</a:t>
             </a:r>
             <a:r>
-              <a:rPr lang="fr-BE" dirty="0"/>
+              <a:rPr lang="fr-BE" sz="2000" dirty="0"/>
               <a:t> in-house programs</a:t>
             </a:r>
           </a:p>
@@ -10129,10 +10600,15 @@
             <a:spLocks noGrp="1"/>
           </p:cNvSpPr>
           <p:nvPr>
-            <p:ph type="ftr" sz="quarter" idx="11"/>
+            <p:ph type="ftr" sz="quarter" idx="4294967295"/>
           </p:nvPr>
         </p:nvSpPr>
-        <p:spPr/>
+        <p:spPr>
+          <a:xfrm>
+            <a:off x="0" y="0"/>
+            <a:ext cx="0" cy="0"/>
+          </a:xfrm>
+        </p:spPr>
         <p:txBody>
           <a:bodyPr/>
           <a:lstStyle/>
@@ -11030,15 +11506,6 @@
 </file>
 
 <file path=customXml/item1.xml><?xml version="1.0" encoding="utf-8"?>
-<?mso-contentType ?>
-<FormTemplates xmlns="http://schemas.microsoft.com/sharepoint/v3/contenttype/forms">
-  <Display>DocumentLibraryForm</Display>
-  <Edit>DocumentLibraryForm</Edit>
-  <New>DocumentLibraryForm</New>
-</FormTemplates>
-</file>
-
-<file path=customXml/item2.xml><?xml version="1.0" encoding="utf-8"?>
 <p:properties xmlns:p="http://schemas.microsoft.com/office/2006/metadata/properties" xmlns:xsi="http://www.w3.org/2001/XMLSchema-instance" xmlns:pc="http://schemas.microsoft.com/office/infopath/2007/PartnerControls">
   <documentManagement>
     <lcf76f155ced4ddcb4097134ff3c332f xmlns="0e422b70-e85d-4377-8ee0-b6227433d381">
@@ -11047,6 +11514,15 @@
     <TaxCatchAll xmlns="199f642e-5af9-486c-ac06-f366742ef41a"/>
   </documentManagement>
 </p:properties>
+</file>
+
+<file path=customXml/item2.xml><?xml version="1.0" encoding="utf-8"?>
+<?mso-contentType ?>
+<FormTemplates xmlns="http://schemas.microsoft.com/sharepoint/v3/contenttype/forms">
+  <Display>DocumentLibraryForm</Display>
+  <Edit>DocumentLibraryForm</Edit>
+  <New>DocumentLibraryForm</New>
+</FormTemplates>
 </file>
 
 <file path=customXml/item3.xml><?xml version="1.0" encoding="utf-8"?>
@@ -11291,14 +11767,6 @@
 </file>
 
 <file path=customXml/itemProps1.xml><?xml version="1.0" encoding="utf-8"?>
-<ds:datastoreItem xmlns:ds="http://schemas.openxmlformats.org/officeDocument/2006/customXml" ds:itemID="{67DD9E9F-9EEB-4105-B29B-819486C2855A}">
-  <ds:schemaRefs>
-    <ds:schemaRef ds:uri="http://schemas.microsoft.com/sharepoint/v3/contenttype/forms"/>
-  </ds:schemaRefs>
-</ds:datastoreItem>
-</file>
-
-<file path=customXml/itemProps2.xml><?xml version="1.0" encoding="utf-8"?>
 <ds:datastoreItem xmlns:ds="http://schemas.openxmlformats.org/officeDocument/2006/customXml" ds:itemID="{2D6C293B-B8B4-4284-A17E-9F9E4C32B25A}">
   <ds:schemaRefs>
     <ds:schemaRef ds:uri="http://schemas.microsoft.com/office/2006/documentManagement/types"/>
@@ -11311,6 +11779,14 @@
     <ds:schemaRef ds:uri="http://schemas.openxmlformats.org/package/2006/metadata/core-properties"/>
     <ds:schemaRef ds:uri="http://schemas.microsoft.com/office/2006/metadata/properties"/>
     <ds:schemaRef ds:uri="http://www.w3.org/XML/1998/namespace"/>
+  </ds:schemaRefs>
+</ds:datastoreItem>
+</file>
+
+<file path=customXml/itemProps2.xml><?xml version="1.0" encoding="utf-8"?>
+<ds:datastoreItem xmlns:ds="http://schemas.openxmlformats.org/officeDocument/2006/customXml" ds:itemID="{67DD9E9F-9EEB-4105-B29B-819486C2855A}">
+  <ds:schemaRefs>
+    <ds:schemaRef ds:uri="http://schemas.microsoft.com/sharepoint/v3/contenttype/forms"/>
   </ds:schemaRefs>
 </ds:datastoreItem>
 </file>

--- a/4 Routine SA processing.pptx
+++ b/4 Routine SA processing.pptx
@@ -278,7 +278,7 @@
       <p15:notesGuideLst xmlns:p15="http://schemas.microsoft.com/office/powerpoint/2012/main"/>
     </p:ext>
     <p:ext uri="http://customooxmlschemas.google.com/">
-      <go:slidesCustomData xmlns="" xmlns:go="http://customooxmlschemas.google.com/" xmlns:ahyp="http://schemas.microsoft.com/office/drawing/2018/hyperlinkcolor" xmlns:p15="http://schemas.microsoft.com/office/powerpoint/2012/main" xmlns:p14="http://schemas.microsoft.com/office/powerpoint/2010/main" xmlns:com="http://schemas.openxmlformats.org/drawingml/2006/compatibility" xmlns:pvml="urn:schemas-microsoft-com:office:powerpoint" xmlns:v="urn:schemas-microsoft-com:vml" xmlns:o="urn:schemas-microsoft-com:office:office" xmlns:dgm="http://schemas.openxmlformats.org/drawingml/2006/diagram" xmlns:c="http://schemas.openxmlformats.org/drawingml/2006/chart" xmlns:mv="urn:schemas-microsoft-com:mac:vml" xmlns:mc="http://schemas.openxmlformats.org/markup-compatibility/2006" r:id="rId59" roundtripDataSignature="AMtx7mh3YP3xexYcFoahXa2ehi0H5V4Zaw=="/>
+      <go:slidesCustomData xmlns:mc="http://schemas.openxmlformats.org/markup-compatibility/2006" xmlns:mv="urn:schemas-microsoft-com:mac:vml" xmlns:c="http://schemas.openxmlformats.org/drawingml/2006/chart" xmlns:dgm="http://schemas.openxmlformats.org/drawingml/2006/diagram" xmlns:o="urn:schemas-microsoft-com:office:office" xmlns:v="urn:schemas-microsoft-com:vml" xmlns:pvml="urn:schemas-microsoft-com:office:powerpoint" xmlns:com="http://schemas.openxmlformats.org/drawingml/2006/compatibility" xmlns:p14="http://schemas.microsoft.com/office/powerpoint/2010/main" xmlns:p15="http://schemas.microsoft.com/office/powerpoint/2012/main" xmlns:ahyp="http://schemas.microsoft.com/office/drawing/2018/hyperlinkcolor" xmlns:go="http://customooxmlschemas.google.com/" xmlns="" r:id="rId59" roundtripDataSignature="AMtx7mh3YP3xexYcFoahXa2ehi0H5V4Zaw=="/>
     </p:ext>
   </p:extLst>
 </p:presentation>
@@ -386,7 +386,7 @@
           <a:p>
             <a:fld id="{0CBFB8CE-488C-4A7E-87F2-3AF6127C51C1}" type="datetimeFigureOut">
               <a:rPr lang="en-IE" smtClean="0"/>
-              <a:t>28/09/2026</a:t>
+              <a:t>30/09/2026</a:t>
             </a:fld>
             <a:endParaRPr lang="en-IE"/>
           </a:p>
@@ -6741,6 +6741,37 @@
           <a:chExt cx="0" cy="0"/>
         </a:xfrm>
       </p:grpSpPr>
+      <p:pic>
+        <p:nvPicPr>
+          <p:cNvPr id="16" name="Image 15">
+            <a:extLst>
+              <a:ext uri="{FF2B5EF4-FFF2-40B4-BE49-F238E27FC236}">
+                <a16:creationId xmlns:a16="http://schemas.microsoft.com/office/drawing/2014/main" id="{B16635BD-DBD1-37D2-4199-F3B23EEE00A0}"/>
+              </a:ext>
+            </a:extLst>
+          </p:cNvPr>
+          <p:cNvPicPr>
+            <a:picLocks noChangeAspect="1"/>
+          </p:cNvPicPr>
+          <p:nvPr/>
+        </p:nvPicPr>
+        <p:blipFill>
+          <a:blip r:embed="rId2"/>
+          <a:stretch>
+            <a:fillRect/>
+          </a:stretch>
+        </p:blipFill>
+        <p:spPr>
+          <a:xfrm>
+            <a:off x="6902530" y="3713829"/>
+            <a:ext cx="4771060" cy="2162384"/>
+          </a:xfrm>
+          <a:prstGeom prst="rect">
+            <a:avLst/>
+          </a:prstGeom>
+          <a:noFill/>
+        </p:spPr>
+      </p:pic>
       <p:sp>
         <p:nvSpPr>
           <p:cNvPr id="2" name="Titre 1">
@@ -6820,10 +6851,93 @@
           <a:bodyPr/>
           <a:lstStyle/>
           <a:p>
-            <a:endParaRPr lang="en-GB"/>
+            <a:r>
+              <a:rPr lang="en-GB" dirty="0"/>
+              <a:t>Read/write operations on workspaces</a:t>
+            </a:r>
+          </a:p>
+          <a:p>
+            <a:r>
+              <a:rPr lang="en-GB" dirty="0"/>
+              <a:t>Refreshing policies</a:t>
+            </a:r>
+          </a:p>
+          <a:p>
+            <a:r>
+              <a:rPr lang="en-GB" dirty="0"/>
+              <a:t>…</a:t>
+            </a:r>
+          </a:p>
+          <a:p>
+            <a:endParaRPr lang="en-GB" dirty="0"/>
           </a:p>
         </p:txBody>
       </p:sp>
+      <p:pic>
+        <p:nvPicPr>
+          <p:cNvPr id="12" name="Image 11">
+            <a:extLst>
+              <a:ext uri="{FF2B5EF4-FFF2-40B4-BE49-F238E27FC236}">
+                <a16:creationId xmlns:a16="http://schemas.microsoft.com/office/drawing/2014/main" id="{41532F22-155D-FF16-B24E-1704C3E6BDA1}"/>
+              </a:ext>
+            </a:extLst>
+          </p:cNvPr>
+          <p:cNvPicPr>
+            <a:picLocks noChangeAspect="1"/>
+          </p:cNvPicPr>
+          <p:nvPr/>
+        </p:nvPicPr>
+        <p:blipFill>
+          <a:blip r:embed="rId3"/>
+          <a:stretch>
+            <a:fillRect/>
+          </a:stretch>
+        </p:blipFill>
+        <p:spPr>
+          <a:xfrm>
+            <a:off x="518410" y="2702214"/>
+            <a:ext cx="5744537" cy="2335953"/>
+          </a:xfrm>
+          <a:prstGeom prst="rect">
+            <a:avLst/>
+          </a:prstGeom>
+          <a:ln>
+            <a:solidFill>
+              <a:schemeClr val="tx1"/>
+            </a:solidFill>
+          </a:ln>
+        </p:spPr>
+      </p:pic>
+      <p:pic>
+        <p:nvPicPr>
+          <p:cNvPr id="14" name="Image 13">
+            <a:extLst>
+              <a:ext uri="{FF2B5EF4-FFF2-40B4-BE49-F238E27FC236}">
+                <a16:creationId xmlns:a16="http://schemas.microsoft.com/office/drawing/2014/main" id="{8BC6C7FE-6325-EE27-F3FB-2D4A77B9B8AE}"/>
+              </a:ext>
+            </a:extLst>
+          </p:cNvPr>
+          <p:cNvPicPr>
+            <a:picLocks noChangeAspect="1"/>
+          </p:cNvPicPr>
+          <p:nvPr/>
+        </p:nvPicPr>
+        <p:blipFill>
+          <a:blip r:embed="rId4"/>
+          <a:stretch>
+            <a:fillRect/>
+          </a:stretch>
+        </p:blipFill>
+        <p:spPr>
+          <a:xfrm>
+            <a:off x="6902530" y="1450637"/>
+            <a:ext cx="4771060" cy="2162385"/>
+          </a:xfrm>
+          <a:prstGeom prst="rect">
+            <a:avLst/>
+          </a:prstGeom>
+        </p:spPr>
+      </p:pic>
     </p:spTree>
     <p:extLst>
       <p:ext uri="{BB962C8B-B14F-4D97-AF65-F5344CB8AC3E}">
@@ -11506,6 +11620,15 @@
 </file>
 
 <file path=customXml/item1.xml><?xml version="1.0" encoding="utf-8"?>
+<?mso-contentType ?>
+<FormTemplates xmlns="http://schemas.microsoft.com/sharepoint/v3/contenttype/forms">
+  <Display>DocumentLibraryForm</Display>
+  <Edit>DocumentLibraryForm</Edit>
+  <New>DocumentLibraryForm</New>
+</FormTemplates>
+</file>
+
+<file path=customXml/item2.xml><?xml version="1.0" encoding="utf-8"?>
 <p:properties xmlns:p="http://schemas.microsoft.com/office/2006/metadata/properties" xmlns:xsi="http://www.w3.org/2001/XMLSchema-instance" xmlns:pc="http://schemas.microsoft.com/office/infopath/2007/PartnerControls">
   <documentManagement>
     <lcf76f155ced4ddcb4097134ff3c332f xmlns="0e422b70-e85d-4377-8ee0-b6227433d381">
@@ -11514,15 +11637,6 @@
     <TaxCatchAll xmlns="199f642e-5af9-486c-ac06-f366742ef41a"/>
   </documentManagement>
 </p:properties>
-</file>
-
-<file path=customXml/item2.xml><?xml version="1.0" encoding="utf-8"?>
-<?mso-contentType ?>
-<FormTemplates xmlns="http://schemas.microsoft.com/sharepoint/v3/contenttype/forms">
-  <Display>DocumentLibraryForm</Display>
-  <Edit>DocumentLibraryForm</Edit>
-  <New>DocumentLibraryForm</New>
-</FormTemplates>
 </file>
 
 <file path=customXml/item3.xml><?xml version="1.0" encoding="utf-8"?>
@@ -11767,6 +11881,14 @@
 </file>
 
 <file path=customXml/itemProps1.xml><?xml version="1.0" encoding="utf-8"?>
+<ds:datastoreItem xmlns:ds="http://schemas.openxmlformats.org/officeDocument/2006/customXml" ds:itemID="{67DD9E9F-9EEB-4105-B29B-819486C2855A}">
+  <ds:schemaRefs>
+    <ds:schemaRef ds:uri="http://schemas.microsoft.com/sharepoint/v3/contenttype/forms"/>
+  </ds:schemaRefs>
+</ds:datastoreItem>
+</file>
+
+<file path=customXml/itemProps2.xml><?xml version="1.0" encoding="utf-8"?>
 <ds:datastoreItem xmlns:ds="http://schemas.openxmlformats.org/officeDocument/2006/customXml" ds:itemID="{2D6C293B-B8B4-4284-A17E-9F9E4C32B25A}">
   <ds:schemaRefs>
     <ds:schemaRef ds:uri="http://schemas.microsoft.com/office/2006/documentManagement/types"/>
@@ -11779,14 +11901,6 @@
     <ds:schemaRef ds:uri="http://schemas.openxmlformats.org/package/2006/metadata/core-properties"/>
     <ds:schemaRef ds:uri="http://schemas.microsoft.com/office/2006/metadata/properties"/>
     <ds:schemaRef ds:uri="http://www.w3.org/XML/1998/namespace"/>
-  </ds:schemaRefs>
-</ds:datastoreItem>
-</file>
-
-<file path=customXml/itemProps2.xml><?xml version="1.0" encoding="utf-8"?>
-<ds:datastoreItem xmlns:ds="http://schemas.openxmlformats.org/officeDocument/2006/customXml" ds:itemID="{67DD9E9F-9EEB-4105-B29B-819486C2855A}">
-  <ds:schemaRefs>
-    <ds:schemaRef ds:uri="http://schemas.microsoft.com/sharepoint/v3/contenttype/forms"/>
   </ds:schemaRefs>
 </ds:datastoreItem>
 </file>

--- a/4 Routine SA processing.pptx
+++ b/4 Routine SA processing.pptx
@@ -278,7 +278,7 @@
       <p15:notesGuideLst xmlns:p15="http://schemas.microsoft.com/office/powerpoint/2012/main"/>
     </p:ext>
     <p:ext uri="http://customooxmlschemas.google.com/">
-      <go:slidesCustomData xmlns:mc="http://schemas.openxmlformats.org/markup-compatibility/2006" xmlns:mv="urn:schemas-microsoft-com:mac:vml" xmlns:c="http://schemas.openxmlformats.org/drawingml/2006/chart" xmlns:dgm="http://schemas.openxmlformats.org/drawingml/2006/diagram" xmlns:o="urn:schemas-microsoft-com:office:office" xmlns:v="urn:schemas-microsoft-com:vml" xmlns:pvml="urn:schemas-microsoft-com:office:powerpoint" xmlns:com="http://schemas.openxmlformats.org/drawingml/2006/compatibility" xmlns:p14="http://schemas.microsoft.com/office/powerpoint/2010/main" xmlns:p15="http://schemas.microsoft.com/office/powerpoint/2012/main" xmlns:ahyp="http://schemas.microsoft.com/office/drawing/2018/hyperlinkcolor" xmlns:go="http://customooxmlschemas.google.com/" xmlns="" r:id="rId59" roundtripDataSignature="AMtx7mh3YP3xexYcFoahXa2ehi0H5V4Zaw=="/>
+      <go:slidesCustomData xmlns="" xmlns:go="http://customooxmlschemas.google.com/" xmlns:ahyp="http://schemas.microsoft.com/office/drawing/2018/hyperlinkcolor" xmlns:p15="http://schemas.microsoft.com/office/powerpoint/2012/main" xmlns:p14="http://schemas.microsoft.com/office/powerpoint/2010/main" xmlns:com="http://schemas.openxmlformats.org/drawingml/2006/compatibility" xmlns:pvml="urn:schemas-microsoft-com:office:powerpoint" xmlns:v="urn:schemas-microsoft-com:vml" xmlns:o="urn:schemas-microsoft-com:office:office" xmlns:dgm="http://schemas.openxmlformats.org/drawingml/2006/diagram" xmlns:c="http://schemas.openxmlformats.org/drawingml/2006/chart" xmlns:mv="urn:schemas-microsoft-com:mac:vml" xmlns:mc="http://schemas.openxmlformats.org/markup-compatibility/2006" r:id="rId59" roundtripDataSignature="AMtx7mh3YP3xexYcFoahXa2ehi0H5V4Zaw=="/>
     </p:ext>
   </p:extLst>
 </p:presentation>
@@ -386,7 +386,7 @@
           <a:p>
             <a:fld id="{0CBFB8CE-488C-4A7E-87F2-3AF6127C51C1}" type="datetimeFigureOut">
               <a:rPr lang="en-IE" smtClean="0"/>
-              <a:t>30/09/2026</a:t>
+              <a:t>01/10/2026</a:t>
             </a:fld>
             <a:endParaRPr lang="en-IE"/>
           </a:p>
@@ -6213,8 +6213,12 @@
           <a:lstStyle/>
           <a:p>
             <a:r>
+              <a:rPr lang="en-GB"/>
+              <a:t>4 Routine </a:t>
+            </a:r>
+            <a:r>
               <a:rPr lang="en-GB" dirty="0"/>
-              <a:t>Routine SA processing with JD+</a:t>
+              <a:t>SA processing with JD+</a:t>
             </a:r>
             <a:endParaRPr lang="en-IE" dirty="0"/>
           </a:p>
@@ -11620,15 +11624,6 @@
 </file>
 
 <file path=customXml/item1.xml><?xml version="1.0" encoding="utf-8"?>
-<?mso-contentType ?>
-<FormTemplates xmlns="http://schemas.microsoft.com/sharepoint/v3/contenttype/forms">
-  <Display>DocumentLibraryForm</Display>
-  <Edit>DocumentLibraryForm</Edit>
-  <New>DocumentLibraryForm</New>
-</FormTemplates>
-</file>
-
-<file path=customXml/item2.xml><?xml version="1.0" encoding="utf-8"?>
 <p:properties xmlns:p="http://schemas.microsoft.com/office/2006/metadata/properties" xmlns:xsi="http://www.w3.org/2001/XMLSchema-instance" xmlns:pc="http://schemas.microsoft.com/office/infopath/2007/PartnerControls">
   <documentManagement>
     <lcf76f155ced4ddcb4097134ff3c332f xmlns="0e422b70-e85d-4377-8ee0-b6227433d381">
@@ -11637,6 +11632,15 @@
     <TaxCatchAll xmlns="199f642e-5af9-486c-ac06-f366742ef41a"/>
   </documentManagement>
 </p:properties>
+</file>
+
+<file path=customXml/item2.xml><?xml version="1.0" encoding="utf-8"?>
+<?mso-contentType ?>
+<FormTemplates xmlns="http://schemas.microsoft.com/sharepoint/v3/contenttype/forms">
+  <Display>DocumentLibraryForm</Display>
+  <Edit>DocumentLibraryForm</Edit>
+  <New>DocumentLibraryForm</New>
+</FormTemplates>
 </file>
 
 <file path=customXml/item3.xml><?xml version="1.0" encoding="utf-8"?>
@@ -11881,14 +11885,6 @@
 </file>
 
 <file path=customXml/itemProps1.xml><?xml version="1.0" encoding="utf-8"?>
-<ds:datastoreItem xmlns:ds="http://schemas.openxmlformats.org/officeDocument/2006/customXml" ds:itemID="{67DD9E9F-9EEB-4105-B29B-819486C2855A}">
-  <ds:schemaRefs>
-    <ds:schemaRef ds:uri="http://schemas.microsoft.com/sharepoint/v3/contenttype/forms"/>
-  </ds:schemaRefs>
-</ds:datastoreItem>
-</file>
-
-<file path=customXml/itemProps2.xml><?xml version="1.0" encoding="utf-8"?>
 <ds:datastoreItem xmlns:ds="http://schemas.openxmlformats.org/officeDocument/2006/customXml" ds:itemID="{2D6C293B-B8B4-4284-A17E-9F9E4C32B25A}">
   <ds:schemaRefs>
     <ds:schemaRef ds:uri="http://schemas.microsoft.com/office/2006/documentManagement/types"/>
@@ -11901,6 +11897,14 @@
     <ds:schemaRef ds:uri="http://schemas.openxmlformats.org/package/2006/metadata/core-properties"/>
     <ds:schemaRef ds:uri="http://schemas.microsoft.com/office/2006/metadata/properties"/>
     <ds:schemaRef ds:uri="http://www.w3.org/XML/1998/namespace"/>
+  </ds:schemaRefs>
+</ds:datastoreItem>
+</file>
+
+<file path=customXml/itemProps2.xml><?xml version="1.0" encoding="utf-8"?>
+<ds:datastoreItem xmlns:ds="http://schemas.openxmlformats.org/officeDocument/2006/customXml" ds:itemID="{67DD9E9F-9EEB-4105-B29B-819486C2855A}">
+  <ds:schemaRefs>
+    <ds:schemaRef ds:uri="http://schemas.microsoft.com/sharepoint/v3/contenttype/forms"/>
   </ds:schemaRefs>
 </ds:datastoreItem>
 </file>
